--- a/thesis/prezentacja_postep.pptx
+++ b/thesis/prezentacja_postep.pptx
@@ -10,6 +10,10 @@
     <p:sldId id="258" r:id="rId9"/>
     <p:sldId id="259" r:id="rId10"/>
     <p:sldId id="260" r:id="rId11"/>
+    <p:sldId id="261" r:id="rId12"/>
+    <p:sldId id="262" r:id="rId13"/>
+    <p:sldId id="263" r:id="rId14"/>
+    <p:sldId id="264" r:id="rId15"/>
   </p:sldIdLst>
   <p:sldSz cx="14630400" cy="8229600" type="screen4x3"/>
   <p:notesSz cx="6858000" cy="9144000"/>
@@ -3318,7 +3322,7 @@
               </a:defRPr>
             </a:pPr>
             <a:r>
-              <a:t>1 / 5</a:t>
+              <a:t>1 / 9</a:t>
             </a:r>
           </a:p>
         </p:txBody>
@@ -3992,7 +3996,7 @@
               </a:defRPr>
             </a:pPr>
             <a:r>
-              <a:t>Co już jest zrobione</a:t>
+              <a:t>Co już działa — importer i obliczenia offline</a:t>
             </a:r>
           </a:p>
         </p:txBody>
@@ -4170,7 +4174,7 @@
               </a:defRPr>
             </a:pPr>
             <a:r>
-              <a:t>2 / 5</a:t>
+              <a:t>2 / 9</a:t>
             </a:r>
           </a:p>
         </p:txBody>
@@ -4183,8 +4187,8 @@
         </p:nvSpPr>
         <p:spPr>
           <a:xfrm>
-            <a:off x="658368" y="1572768"/>
-            <a:ext cx="13313664" cy="493776"/>
+            <a:off x="658368" y="1554480"/>
+            <a:ext cx="13313664" cy="484632"/>
           </a:xfrm>
           <a:prstGeom prst="rect">
             <a:avLst/>
@@ -4199,15 +4203,15 @@
           <a:p>
             <a:pPr algn="l">
               <a:lnSpc>
-                <a:spcPts val="2899"/>
-              </a:lnSpc>
-              <a:spcBef>
-                <a:spcPts val="0"/>
-              </a:spcBef>
-              <a:spcAft>
-                <a:spcPts val="0"/>
-              </a:spcAft>
-              <a:defRPr sz="2500" b="0" lang="pl-PL">
+                <a:spcPts val="3015"/>
+              </a:lnSpc>
+              <a:spcBef>
+                <a:spcPts val="0"/>
+              </a:spcBef>
+              <a:spcAft>
+                <a:spcPts val="0"/>
+              </a:spcAft>
+              <a:defRPr sz="2600" b="0" lang="pl-PL">
                 <a:solidFill>
                   <a:srgbClr val="18232D"/>
                 </a:solidFill>
@@ -4215,111 +4219,21 @@
               </a:defRPr>
             </a:pPr>
             <a:r>
-              <a:t>rankr-import (Rust) i scoring offline działają; frontend i backend są planowane.</a:t>
-            </a:r>
-          </a:p>
-        </p:txBody>
-      </p:sp>
-      <p:sp>
-        <p:nvSpPr>
-          <p:cNvPr id="8" name="TextBox 7"/>
-          <p:cNvSpPr txBox="1"/>
-          <p:nvPr/>
-        </p:nvSpPr>
-        <p:spPr>
-          <a:xfrm>
-            <a:off x="822959" y="2231136"/>
-            <a:ext cx="4480560" cy="384048"/>
-          </a:xfrm>
-          <a:prstGeom prst="rect">
-            <a:avLst/>
-          </a:prstGeom>
-          <a:noFill/>
-        </p:spPr>
-        <p:txBody>
-          <a:bodyPr wrap="square" lIns="0" rIns="0" tIns="0" bIns="0" anchor="t">
-            <a:noAutofit/>
-          </a:bodyPr>
-          <a:lstStyle/>
-          <a:p>
-            <a:pPr algn="l">
-              <a:lnSpc>
-                <a:spcPts val="2668"/>
-              </a:lnSpc>
-              <a:spcBef>
-                <a:spcPts val="0"/>
-              </a:spcBef>
-              <a:spcAft>
-                <a:spcPts val="0"/>
-              </a:spcAft>
-              <a:defRPr sz="2300" b="1" lang="pl-PL">
-                <a:solidFill>
-                  <a:srgbClr val="4C5B67"/>
-                </a:solidFill>
-                <a:latin typeface="FreeSans"/>
-              </a:defRPr>
-            </a:pPr>
-            <a:r>
-              <a:t>Komenda</a:t>
-            </a:r>
-          </a:p>
-        </p:txBody>
-      </p:sp>
-      <p:sp>
-        <p:nvSpPr>
-          <p:cNvPr id="9" name="TextBox 8"/>
-          <p:cNvSpPr txBox="1"/>
-          <p:nvPr/>
-        </p:nvSpPr>
-        <p:spPr>
-          <a:xfrm>
-            <a:off x="5650992" y="2231136"/>
-            <a:ext cx="7955279" cy="384048"/>
-          </a:xfrm>
-          <a:prstGeom prst="rect">
-            <a:avLst/>
-          </a:prstGeom>
-          <a:noFill/>
-        </p:spPr>
-        <p:txBody>
-          <a:bodyPr wrap="square" lIns="0" rIns="0" tIns="0" bIns="0" anchor="t">
-            <a:noAutofit/>
-          </a:bodyPr>
-          <a:lstStyle/>
-          <a:p>
-            <a:pPr algn="l">
-              <a:lnSpc>
-                <a:spcPts val="2668"/>
-              </a:lnSpc>
-              <a:spcBef>
-                <a:spcPts val="0"/>
-              </a:spcBef>
-              <a:spcAft>
-                <a:spcPts val="0"/>
-              </a:spcAft>
-              <a:defRPr sz="2300" b="1" lang="pl-PL">
-                <a:solidFill>
-                  <a:srgbClr val="4C5B67"/>
-                </a:solidFill>
-                <a:latin typeface="FreeSans"/>
-              </a:defRPr>
-            </a:pPr>
-            <a:r>
-              <a:t>Zrealizowany zakres</a:t>
-            </a:r>
-          </a:p>
-        </p:txBody>
-      </p:sp>
-      <p:sp>
-        <p:nvSpPr>
-          <p:cNvPr id="10" name="Rectangle 9"/>
+              <a:t>rankr-import w Rust; frontend i backend aplikacji webowej są nadal planowane.</a:t>
+            </a:r>
+          </a:p>
+        </p:txBody>
+      </p:sp>
+      <p:sp>
+        <p:nvSpPr>
+          <p:cNvPr id="8" name="Rectangle 7"/>
           <p:cNvSpPr/>
           <p:nvPr/>
         </p:nvSpPr>
         <p:spPr>
           <a:xfrm>
-            <a:off x="658368" y="2724912"/>
-            <a:ext cx="13313664" cy="676656"/>
+            <a:off x="658368" y="2267712"/>
+            <a:ext cx="13313664" cy="630936"/>
           </a:xfrm>
           <a:prstGeom prst="rect">
             <a:avLst/>
@@ -4355,14 +4269,14 @@
       </p:sp>
       <p:sp>
         <p:nvSpPr>
-          <p:cNvPr id="11" name="TextBox 10"/>
-          <p:cNvSpPr txBox="1"/>
-          <p:nvPr/>
-        </p:nvSpPr>
-        <p:spPr>
-          <a:xfrm>
-            <a:off x="822959" y="2843784"/>
-            <a:ext cx="4617720" cy="475488"/>
+          <p:cNvPr id="9" name="TextBox 8"/>
+          <p:cNvSpPr txBox="1"/>
+          <p:nvPr/>
+        </p:nvSpPr>
+        <p:spPr>
+          <a:xfrm>
+            <a:off x="822959" y="2368296"/>
+            <a:ext cx="4754880" cy="438912"/>
           </a:xfrm>
           <a:prstGeom prst="rect">
             <a:avLst/>
@@ -4377,15 +4291,15 @@
           <a:p>
             <a:pPr algn="l">
               <a:lnSpc>
-                <a:spcPts val="2899"/>
-              </a:lnSpc>
-              <a:spcBef>
-                <a:spcPts val="0"/>
-              </a:spcBef>
-              <a:spcAft>
-                <a:spcPts val="0"/>
-              </a:spcAft>
-              <a:defRPr sz="2500" b="1" lang="pl-PL">
+                <a:spcPts val="2783"/>
+              </a:lnSpc>
+              <a:spcBef>
+                <a:spcPts val="0"/>
+              </a:spcBef>
+              <a:spcAft>
+                <a:spcPts val="0"/>
+              </a:spcAft>
+              <a:defRPr sz="2400" b="1" lang="pl-PL">
                 <a:solidFill>
                   <a:srgbClr val="18232D"/>
                 </a:solidFill>
@@ -4400,14 +4314,14 @@
       </p:sp>
       <p:sp>
         <p:nvSpPr>
-          <p:cNvPr id="12" name="TextBox 11"/>
-          <p:cNvSpPr txBox="1"/>
-          <p:nvPr/>
-        </p:nvSpPr>
-        <p:spPr>
-          <a:xfrm>
-            <a:off x="5650992" y="2843784"/>
-            <a:ext cx="8010144" cy="475488"/>
+          <p:cNvPr id="10" name="TextBox 9"/>
+          <p:cNvSpPr txBox="1"/>
+          <p:nvPr/>
+        </p:nvSpPr>
+        <p:spPr>
+          <a:xfrm>
+            <a:off x="5733288" y="2368296"/>
+            <a:ext cx="8028431" cy="438912"/>
           </a:xfrm>
           <a:prstGeom prst="rect">
             <a:avLst/>
@@ -4422,15 +4336,15 @@
           <a:p>
             <a:pPr algn="l">
               <a:lnSpc>
-                <a:spcPts val="2899"/>
-              </a:lnSpc>
-              <a:spcBef>
-                <a:spcPts val="0"/>
-              </a:spcBef>
-              <a:spcAft>
-                <a:spcPts val="0"/>
-              </a:spcAft>
-              <a:defRPr sz="2500" b="0" lang="pl-PL">
+                <a:spcPts val="2783"/>
+              </a:lnSpc>
+              <a:spcBef>
+                <a:spcPts val="0"/>
+              </a:spcBef>
+              <a:spcAft>
+                <a:spcPts val="0"/>
+              </a:spcAft>
+              <a:defRPr sz="2400" b="0" lang="pl-PL">
                 <a:solidFill>
                   <a:srgbClr val="18232D"/>
                 </a:solidFill>
@@ -4445,14 +4359,14 @@
       </p:sp>
       <p:sp>
         <p:nvSpPr>
-          <p:cNvPr id="13" name="Rectangle 12"/>
+          <p:cNvPr id="11" name="Rectangle 10"/>
           <p:cNvSpPr/>
           <p:nvPr/>
         </p:nvSpPr>
         <p:spPr>
           <a:xfrm>
-            <a:off x="658368" y="3502152"/>
-            <a:ext cx="13313664" cy="1005840"/>
+            <a:off x="658368" y="3008376"/>
+            <a:ext cx="13313664" cy="630936"/>
           </a:xfrm>
           <a:prstGeom prst="rect">
             <a:avLst/>
@@ -4488,14 +4402,14 @@
       </p:sp>
       <p:sp>
         <p:nvSpPr>
-          <p:cNvPr id="14" name="TextBox 13"/>
-          <p:cNvSpPr txBox="1"/>
-          <p:nvPr/>
-        </p:nvSpPr>
-        <p:spPr>
-          <a:xfrm>
-            <a:off x="822959" y="3621024"/>
-            <a:ext cx="4617720" cy="804672"/>
+          <p:cNvPr id="12" name="TextBox 11"/>
+          <p:cNvSpPr txBox="1"/>
+          <p:nvPr/>
+        </p:nvSpPr>
+        <p:spPr>
+          <a:xfrm>
+            <a:off x="822959" y="3108960"/>
+            <a:ext cx="4754880" cy="438912"/>
           </a:xfrm>
           <a:prstGeom prst="rect">
             <a:avLst/>
@@ -4510,15 +4424,15 @@
           <a:p>
             <a:pPr algn="l">
               <a:lnSpc>
-                <a:spcPts val="2899"/>
-              </a:lnSpc>
-              <a:spcBef>
-                <a:spcPts val="0"/>
-              </a:spcBef>
-              <a:spcAft>
-                <a:spcPts val="0"/>
-              </a:spcAft>
-              <a:defRPr sz="2500" b="1" lang="pl-PL">
+                <a:spcPts val="2783"/>
+              </a:lnSpc>
+              <a:spcBef>
+                <a:spcPts val="0"/>
+              </a:spcBef>
+              <a:spcAft>
+                <a:spcPts val="0"/>
+              </a:spcAft>
+              <a:defRPr sz="2400" b="1" lang="pl-PL">
                 <a:solidFill>
                   <a:srgbClr val="18232D"/>
                 </a:solidFill>
@@ -4533,14 +4447,14 @@
       </p:sp>
       <p:sp>
         <p:nvSpPr>
-          <p:cNvPr id="15" name="TextBox 14"/>
-          <p:cNvSpPr txBox="1"/>
-          <p:nvPr/>
-        </p:nvSpPr>
-        <p:spPr>
-          <a:xfrm>
-            <a:off x="5650992" y="3621024"/>
-            <a:ext cx="8010144" cy="804672"/>
+          <p:cNvPr id="13" name="TextBox 12"/>
+          <p:cNvSpPr txBox="1"/>
+          <p:nvPr/>
+        </p:nvSpPr>
+        <p:spPr>
+          <a:xfrm>
+            <a:off x="5733288" y="3108960"/>
+            <a:ext cx="8028431" cy="438912"/>
           </a:xfrm>
           <a:prstGeom prst="rect">
             <a:avLst/>
@@ -4555,15 +4469,15 @@
           <a:p>
             <a:pPr algn="l">
               <a:lnSpc>
-                <a:spcPts val="2899"/>
-              </a:lnSpc>
-              <a:spcBef>
-                <a:spcPts val="0"/>
-              </a:spcBef>
-              <a:spcAft>
-                <a:spcPts val="0"/>
-              </a:spcAft>
-              <a:defRPr sz="2500" b="0" lang="pl-PL">
+                <a:spcPts val="2783"/>
+              </a:lnSpc>
+              <a:spcBef>
+                <a:spcPts val="0"/>
+              </a:spcBef>
+              <a:spcAft>
+                <a:spcPts val="0"/>
+              </a:spcAft>
+              <a:defRPr sz="2400" b="0" lang="pl-PL">
                 <a:solidFill>
                   <a:srgbClr val="18232D"/>
                 </a:solidFill>
@@ -4571,25 +4485,21 @@
               </a:defRPr>
             </a:pPr>
             <a:r>
-              <a:t>Dzienne świece spółek z Yahoo Finance, bez klucza</a:t>
-            </a:r>
-            <a:br/>
-            <a:r>
-              <a:t>API.</a:t>
-            </a:r>
-          </a:p>
-        </p:txBody>
-      </p:sp>
-      <p:sp>
-        <p:nvSpPr>
-          <p:cNvPr id="16" name="Rectangle 15"/>
+              <a:t>Yahoo Finance: historia / ostatnia świeca dzienna.</a:t>
+            </a:r>
+          </a:p>
+        </p:txBody>
+      </p:sp>
+      <p:sp>
+        <p:nvSpPr>
+          <p:cNvPr id="14" name="Rectangle 13"/>
           <p:cNvSpPr/>
           <p:nvPr/>
         </p:nvSpPr>
         <p:spPr>
           <a:xfrm>
-            <a:off x="658368" y="4608576"/>
-            <a:ext cx="13313664" cy="676656"/>
+            <a:off x="658368" y="3749039"/>
+            <a:ext cx="13313664" cy="630936"/>
           </a:xfrm>
           <a:prstGeom prst="rect">
             <a:avLst/>
@@ -4625,14 +4535,14 @@
       </p:sp>
       <p:sp>
         <p:nvSpPr>
-          <p:cNvPr id="17" name="TextBox 16"/>
-          <p:cNvSpPr txBox="1"/>
-          <p:nvPr/>
-        </p:nvSpPr>
-        <p:spPr>
-          <a:xfrm>
-            <a:off x="822959" y="4727448"/>
-            <a:ext cx="4617720" cy="475488"/>
+          <p:cNvPr id="15" name="TextBox 14"/>
+          <p:cNvSpPr txBox="1"/>
+          <p:nvPr/>
+        </p:nvSpPr>
+        <p:spPr>
+          <a:xfrm>
+            <a:off x="822959" y="3849624"/>
+            <a:ext cx="4754880" cy="438912"/>
           </a:xfrm>
           <a:prstGeom prst="rect">
             <a:avLst/>
@@ -4647,15 +4557,15 @@
           <a:p>
             <a:pPr algn="l">
               <a:lnSpc>
-                <a:spcPts val="2899"/>
-              </a:lnSpc>
-              <a:spcBef>
-                <a:spcPts val="0"/>
-              </a:spcBef>
-              <a:spcAft>
-                <a:spcPts val="0"/>
-              </a:spcAft>
-              <a:defRPr sz="2500" b="1" lang="pl-PL">
+                <a:spcPts val="2783"/>
+              </a:lnSpc>
+              <a:spcBef>
+                <a:spcPts val="0"/>
+              </a:spcBef>
+              <a:spcAft>
+                <a:spcPts val="0"/>
+              </a:spcAft>
+              <a:defRPr sz="2400" b="1" lang="pl-PL">
                 <a:solidFill>
                   <a:srgbClr val="18232D"/>
                 </a:solidFill>
@@ -4670,14 +4580,14 @@
       </p:sp>
       <p:sp>
         <p:nvSpPr>
-          <p:cNvPr id="18" name="TextBox 17"/>
-          <p:cNvSpPr txBox="1"/>
-          <p:nvPr/>
-        </p:nvSpPr>
-        <p:spPr>
-          <a:xfrm>
-            <a:off x="5650992" y="4727448"/>
-            <a:ext cx="8010144" cy="475488"/>
+          <p:cNvPr id="16" name="TextBox 15"/>
+          <p:cNvSpPr txBox="1"/>
+          <p:nvPr/>
+        </p:nvSpPr>
+        <p:spPr>
+          <a:xfrm>
+            <a:off x="5733288" y="3849624"/>
+            <a:ext cx="8028431" cy="438912"/>
           </a:xfrm>
           <a:prstGeom prst="rect">
             <a:avLst/>
@@ -4692,15 +4602,15 @@
           <a:p>
             <a:pPr algn="l">
               <a:lnSpc>
-                <a:spcPts val="2899"/>
-              </a:lnSpc>
-              <a:spcBef>
-                <a:spcPts val="0"/>
-              </a:spcBef>
-              <a:spcAft>
-                <a:spcPts val="0"/>
-              </a:spcAft>
-              <a:defRPr sz="2500" b="0" lang="pl-PL">
+                <a:spcPts val="2783"/>
+              </a:lnSpc>
+              <a:spcBef>
+                <a:spcPts val="0"/>
+              </a:spcBef>
+              <a:spcAft>
+                <a:spcPts val="0"/>
+              </a:spcAft>
+              <a:defRPr sz="2400" b="0" lang="pl-PL">
                 <a:solidFill>
                   <a:srgbClr val="18232D"/>
                 </a:solidFill>
@@ -4708,21 +4618,21 @@
               </a:defRPr>
             </a:pPr>
             <a:r>
-              <a:t>Scoring techniczny offline.</a:t>
-            </a:r>
-          </a:p>
-        </p:txBody>
-      </p:sp>
-      <p:sp>
-        <p:nvSpPr>
-          <p:cNvPr id="19" name="Rectangle 18"/>
+              <a:t>Punkty jednego instrumentu / ranking offline.</a:t>
+            </a:r>
+          </a:p>
+        </p:txBody>
+      </p:sp>
+      <p:sp>
+        <p:nvSpPr>
+          <p:cNvPr id="17" name="Rectangle 16"/>
           <p:cNvSpPr/>
           <p:nvPr/>
         </p:nvSpPr>
         <p:spPr>
           <a:xfrm>
-            <a:off x="658368" y="5385816"/>
-            <a:ext cx="13313664" cy="676656"/>
+            <a:off x="658368" y="4489704"/>
+            <a:ext cx="13313664" cy="630936"/>
           </a:xfrm>
           <a:prstGeom prst="rect">
             <a:avLst/>
@@ -4758,14 +4668,104 @@
       </p:sp>
       <p:sp>
         <p:nvSpPr>
+          <p:cNvPr id="18" name="TextBox 17"/>
+          <p:cNvSpPr txBox="1"/>
+          <p:nvPr/>
+        </p:nvSpPr>
+        <p:spPr>
+          <a:xfrm>
+            <a:off x="822959" y="4590288"/>
+            <a:ext cx="4754880" cy="438912"/>
+          </a:xfrm>
+          <a:prstGeom prst="rect">
+            <a:avLst/>
+          </a:prstGeom>
+          <a:noFill/>
+        </p:spPr>
+        <p:txBody>
+          <a:bodyPr wrap="square" lIns="0" rIns="0" tIns="0" bIns="0" anchor="t">
+            <a:noAutofit/>
+          </a:bodyPr>
+          <a:lstStyle/>
+          <a:p>
+            <a:pPr algn="l">
+              <a:lnSpc>
+                <a:spcPts val="2783"/>
+              </a:lnSpc>
+              <a:spcBef>
+                <a:spcPts val="0"/>
+              </a:spcBef>
+              <a:spcAft>
+                <a:spcPts val="0"/>
+              </a:spcAft>
+              <a:defRPr sz="2400" b="1" lang="pl-PL">
+                <a:solidFill>
+                  <a:srgbClr val="18232D"/>
+                </a:solidFill>
+                <a:latin typeface="FreeSans"/>
+              </a:defRPr>
+            </a:pPr>
+            <a:r>
+              <a:t>fundamental-table</a:t>
+            </a:r>
+          </a:p>
+        </p:txBody>
+      </p:sp>
+      <p:sp>
+        <p:nvSpPr>
+          <p:cNvPr id="19" name="TextBox 18"/>
+          <p:cNvSpPr txBox="1"/>
+          <p:nvPr/>
+        </p:nvSpPr>
+        <p:spPr>
+          <a:xfrm>
+            <a:off x="5733288" y="4590288"/>
+            <a:ext cx="8028431" cy="438912"/>
+          </a:xfrm>
+          <a:prstGeom prst="rect">
+            <a:avLst/>
+          </a:prstGeom>
+          <a:noFill/>
+        </p:spPr>
+        <p:txBody>
+          <a:bodyPr wrap="square" lIns="0" rIns="0" tIns="0" bIns="0" anchor="t">
+            <a:noAutofit/>
+          </a:bodyPr>
+          <a:lstStyle/>
+          <a:p>
+            <a:pPr algn="l">
+              <a:lnSpc>
+                <a:spcPts val="2783"/>
+              </a:lnSpc>
+              <a:spcBef>
+                <a:spcPts val="0"/>
+              </a:spcBef>
+              <a:spcAft>
+                <a:spcPts val="0"/>
+              </a:spcAft>
+              <a:defRPr sz="2400" b="0" lang="pl-PL">
+                <a:solidFill>
+                  <a:srgbClr val="18232D"/>
+                </a:solidFill>
+                <a:latin typeface="FreeSans"/>
+              </a:defRPr>
+            </a:pPr>
+            <a:r>
+              <a:t>Surowe wskaźniki z raportu; bez punktów.</a:t>
+            </a:r>
+          </a:p>
+        </p:txBody>
+      </p:sp>
+      <p:sp>
+        <p:nvSpPr>
           <p:cNvPr id="20" name="TextBox 19"/>
           <p:cNvSpPr txBox="1"/>
           <p:nvPr/>
         </p:nvSpPr>
         <p:spPr>
           <a:xfrm>
-            <a:off x="822959" y="5504688"/>
-            <a:ext cx="4617720" cy="475488"/>
+            <a:off x="658368" y="5468112"/>
+            <a:ext cx="13313664" cy="512064"/>
           </a:xfrm>
           <a:prstGeom prst="rect">
             <a:avLst/>
@@ -4780,6 +4780,96 @@
           <a:p>
             <a:pPr algn="l">
               <a:lnSpc>
+                <a:spcPts val="3131"/>
+              </a:lnSpc>
+              <a:spcBef>
+                <a:spcPts val="0"/>
+              </a:spcBef>
+              <a:spcAft>
+                <a:spcPts val="0"/>
+              </a:spcAft>
+              <a:defRPr sz="2700" b="1" lang="pl-PL">
+                <a:solidFill>
+                  <a:srgbClr val="243B53"/>
+                </a:solidFill>
+                <a:latin typeface="FreeSans"/>
+              </a:defRPr>
+            </a:pPr>
+            <a:r>
+              <a:t>Odpowiedź źródła → raw.json → parser → fundamentals.json / history.json</a:t>
+            </a:r>
+          </a:p>
+        </p:txBody>
+      </p:sp>
+      <p:sp>
+        <p:nvSpPr>
+          <p:cNvPr id="21" name="TextBox 20"/>
+          <p:cNvSpPr txBox="1"/>
+          <p:nvPr/>
+        </p:nvSpPr>
+        <p:spPr>
+          <a:xfrm>
+            <a:off x="658368" y="6199632"/>
+            <a:ext cx="6419088" cy="484632"/>
+          </a:xfrm>
+          <a:prstGeom prst="rect">
+            <a:avLst/>
+          </a:prstGeom>
+          <a:noFill/>
+        </p:spPr>
+        <p:txBody>
+          <a:bodyPr wrap="square" lIns="0" rIns="0" tIns="0" bIns="0" anchor="t">
+            <a:noAutofit/>
+          </a:bodyPr>
+          <a:lstStyle/>
+          <a:p>
+            <a:pPr algn="l">
+              <a:lnSpc>
+                <a:spcPts val="3015"/>
+              </a:lnSpc>
+              <a:spcBef>
+                <a:spcPts val="0"/>
+              </a:spcBef>
+              <a:spcAft>
+                <a:spcPts val="0"/>
+              </a:spcAft>
+              <a:defRPr sz="2600" b="1" lang="pl-PL">
+                <a:solidFill>
+                  <a:srgbClr val="243B53"/>
+                </a:solidFill>
+                <a:latin typeface="FreeSans"/>
+              </a:defRPr>
+            </a:pPr>
+            <a:r>
+              <a:t>Fundamenty: bieżące raporty</a:t>
+            </a:r>
+          </a:p>
+        </p:txBody>
+      </p:sp>
+      <p:sp>
+        <p:nvSpPr>
+          <p:cNvPr id="22" name="TextBox 21"/>
+          <p:cNvSpPr txBox="1"/>
+          <p:nvPr/>
+        </p:nvSpPr>
+        <p:spPr>
+          <a:xfrm>
+            <a:off x="658368" y="6784848"/>
+            <a:ext cx="6419088" cy="822960"/>
+          </a:xfrm>
+          <a:prstGeom prst="rect">
+            <a:avLst/>
+          </a:prstGeom>
+          <a:noFill/>
+        </p:spPr>
+        <p:txBody>
+          <a:bodyPr wrap="square" lIns="0" rIns="0" tIns="0" bIns="0" anchor="t">
+            <a:noAutofit/>
+          </a:bodyPr>
+          <a:lstStyle/>
+          <a:p>
+            <a:pPr algn="l">
+              <a:lnSpc>
                 <a:spcPts val="2899"/>
               </a:lnSpc>
               <a:spcBef>
@@ -4788,7 +4878,7 @@
               <a:spcAft>
                 <a:spcPts val="0"/>
               </a:spcAft>
-              <a:defRPr sz="2500" b="1" lang="pl-PL">
+              <a:defRPr sz="2500" b="0" lang="pl-PL">
                 <a:solidFill>
                   <a:srgbClr val="18232D"/>
                 </a:solidFill>
@@ -4796,21 +4886,25 @@
               </a:defRPr>
             </a:pPr>
             <a:r>
-              <a:t>fundamental-table</a:t>
-            </a:r>
-          </a:p>
-        </p:txBody>
-      </p:sp>
-      <p:sp>
-        <p:nvSpPr>
-          <p:cNvPr id="21" name="TextBox 20"/>
-          <p:cNvSpPr txBox="1"/>
-          <p:nvPr/>
-        </p:nvSpPr>
-        <p:spPr>
-          <a:xfrm>
-            <a:off x="5650992" y="5504688"/>
-            <a:ext cx="8010144" cy="475488"/>
+              <a:t>Kolejne obserwacje od startu zbierania.</a:t>
+            </a:r>
+            <a:br/>
+            <a:r>
+              <a:t>Brak importu archiwum sprawozdań.</a:t>
+            </a:r>
+          </a:p>
+        </p:txBody>
+      </p:sp>
+      <p:sp>
+        <p:nvSpPr>
+          <p:cNvPr id="23" name="TextBox 22"/>
+          <p:cNvSpPr txBox="1"/>
+          <p:nvPr/>
+        </p:nvSpPr>
+        <p:spPr>
+          <a:xfrm>
+            <a:off x="7644383" y="6199632"/>
+            <a:ext cx="6291072" cy="484632"/>
           </a:xfrm>
           <a:prstGeom prst="rect">
             <a:avLst/>
@@ -4825,6 +4919,51 @@
           <a:p>
             <a:pPr algn="l">
               <a:lnSpc>
+                <a:spcPts val="3015"/>
+              </a:lnSpc>
+              <a:spcBef>
+                <a:spcPts val="0"/>
+              </a:spcBef>
+              <a:spcAft>
+                <a:spcPts val="0"/>
+              </a:spcAft>
+              <a:defRPr sz="2600" b="1" lang="pl-PL">
+                <a:solidFill>
+                  <a:srgbClr val="243B53"/>
+                </a:solidFill>
+                <a:latin typeface="FreeSans"/>
+              </a:defRPr>
+            </a:pPr>
+            <a:r>
+              <a:t>Ceny: wieloletnia historia dzienna</a:t>
+            </a:r>
+          </a:p>
+        </p:txBody>
+      </p:sp>
+      <p:sp>
+        <p:nvSpPr>
+          <p:cNvPr id="24" name="TextBox 23"/>
+          <p:cNvSpPr txBox="1"/>
+          <p:nvPr/>
+        </p:nvSpPr>
+        <p:spPr>
+          <a:xfrm>
+            <a:off x="7644383" y="6784848"/>
+            <a:ext cx="6291072" cy="822960"/>
+          </a:xfrm>
+          <a:prstGeom prst="rect">
+            <a:avLst/>
+          </a:prstGeom>
+          <a:noFill/>
+        </p:spPr>
+        <p:txBody>
+          <a:bodyPr wrap="square" lIns="0" rIns="0" tIns="0" bIns="0" anchor="t">
+            <a:noAutofit/>
+          </a:bodyPr>
+          <a:lstStyle/>
+          <a:p>
+            <a:pPr algn="l">
+              <a:lnSpc>
                 <a:spcPts val="2899"/>
               </a:lnSpc>
               <a:spcBef>
@@ -4841,191 +4980,11 @@
               </a:defRPr>
             </a:pPr>
             <a:r>
-              <a:t>Surowe wskaźniki z jednego raportu; bez punktów.</a:t>
-            </a:r>
-          </a:p>
-        </p:txBody>
-      </p:sp>
-      <p:sp>
-        <p:nvSpPr>
-          <p:cNvPr id="22" name="TextBox 21"/>
-          <p:cNvSpPr txBox="1"/>
-          <p:nvPr/>
-        </p:nvSpPr>
-        <p:spPr>
-          <a:xfrm>
-            <a:off x="658368" y="6217920"/>
-            <a:ext cx="6400800" cy="466344"/>
-          </a:xfrm>
-          <a:prstGeom prst="rect">
-            <a:avLst/>
-          </a:prstGeom>
-          <a:noFill/>
-        </p:spPr>
-        <p:txBody>
-          <a:bodyPr wrap="square" lIns="0" rIns="0" tIns="0" bIns="0" anchor="t">
-            <a:noAutofit/>
-          </a:bodyPr>
-          <a:lstStyle/>
-          <a:p>
-            <a:pPr algn="l">
-              <a:lnSpc>
-                <a:spcPts val="3015"/>
-              </a:lnSpc>
-              <a:spcBef>
-                <a:spcPts val="0"/>
-              </a:spcBef>
-              <a:spcAft>
-                <a:spcPts val="0"/>
-              </a:spcAft>
-              <a:defRPr sz="2600" b="1" lang="pl-PL">
-                <a:solidFill>
-                  <a:srgbClr val="243B53"/>
-                </a:solidFill>
-                <a:latin typeface="FreeSans"/>
-              </a:defRPr>
-            </a:pPr>
-            <a:r>
-              <a:t>Dane finansowe</a:t>
-            </a:r>
-          </a:p>
-        </p:txBody>
-      </p:sp>
-      <p:sp>
-        <p:nvSpPr>
-          <p:cNvPr id="23" name="TextBox 22"/>
-          <p:cNvSpPr txBox="1"/>
-          <p:nvPr/>
-        </p:nvSpPr>
-        <p:spPr>
-          <a:xfrm>
-            <a:off x="658368" y="6702552"/>
-            <a:ext cx="6400800" cy="786384"/>
-          </a:xfrm>
-          <a:prstGeom prst="rect">
-            <a:avLst/>
-          </a:prstGeom>
-          <a:noFill/>
-        </p:spPr>
-        <p:txBody>
-          <a:bodyPr wrap="square" lIns="0" rIns="0" tIns="0" bIns="0" anchor="t">
-            <a:noAutofit/>
-          </a:bodyPr>
-          <a:lstStyle/>
-          <a:p>
-            <a:pPr algn="l">
-              <a:lnSpc>
-                <a:spcPts val="2783"/>
-              </a:lnSpc>
-              <a:spcBef>
-                <a:spcPts val="0"/>
-              </a:spcBef>
-              <a:spcAft>
-                <a:spcPts val="0"/>
-              </a:spcAft>
-              <a:defRPr sz="2400" b="0" lang="pl-PL">
-                <a:solidFill>
-                  <a:srgbClr val="18232D"/>
-                </a:solidFill>
-                <a:latin typeface="FreeSans"/>
-              </a:defRPr>
-            </a:pPr>
-            <a:r>
-              <a:t>Jeden bieżący snapshot na spółkę.</a:t>
+              <a:t>Yahoo Finance bez klucza API.</a:t>
             </a:r>
             <a:br/>
             <a:r>
-              <a:t>Nie ma historii sprawozdań.</a:t>
-            </a:r>
-          </a:p>
-        </p:txBody>
-      </p:sp>
-      <p:sp>
-        <p:nvSpPr>
-          <p:cNvPr id="24" name="TextBox 23"/>
-          <p:cNvSpPr txBox="1"/>
-          <p:nvPr/>
-        </p:nvSpPr>
-        <p:spPr>
-          <a:xfrm>
-            <a:off x="7589520" y="6217920"/>
-            <a:ext cx="6309360" cy="466344"/>
-          </a:xfrm>
-          <a:prstGeom prst="rect">
-            <a:avLst/>
-          </a:prstGeom>
-          <a:noFill/>
-        </p:spPr>
-        <p:txBody>
-          <a:bodyPr wrap="square" lIns="0" rIns="0" tIns="0" bIns="0" anchor="t">
-            <a:noAutofit/>
-          </a:bodyPr>
-          <a:lstStyle/>
-          <a:p>
-            <a:pPr algn="l">
-              <a:lnSpc>
-                <a:spcPts val="3015"/>
-              </a:lnSpc>
-              <a:spcBef>
-                <a:spcPts val="0"/>
-              </a:spcBef>
-              <a:spcAft>
-                <a:spcPts val="0"/>
-              </a:spcAft>
-              <a:defRPr sz="2600" b="1" lang="pl-PL">
-                <a:solidFill>
-                  <a:srgbClr val="243B53"/>
-                </a:solidFill>
-                <a:latin typeface="FreeSans"/>
-              </a:defRPr>
-            </a:pPr>
-            <a:r>
-              <a:t>Ceny</a:t>
-            </a:r>
-          </a:p>
-        </p:txBody>
-      </p:sp>
-      <p:sp>
-        <p:nvSpPr>
-          <p:cNvPr id="25" name="TextBox 24"/>
-          <p:cNvSpPr txBox="1"/>
-          <p:nvPr/>
-        </p:nvSpPr>
-        <p:spPr>
-          <a:xfrm>
-            <a:off x="7589520" y="6702552"/>
-            <a:ext cx="6309360" cy="786384"/>
-          </a:xfrm>
-          <a:prstGeom prst="rect">
-            <a:avLst/>
-          </a:prstGeom>
-          <a:noFill/>
-        </p:spPr>
-        <p:txBody>
-          <a:bodyPr wrap="square" lIns="0" rIns="0" tIns="0" bIns="0" anchor="t">
-            <a:noAutofit/>
-          </a:bodyPr>
-          <a:lstStyle/>
-          <a:p>
-            <a:pPr algn="l">
-              <a:lnSpc>
-                <a:spcPts val="2783"/>
-              </a:lnSpc>
-              <a:spcBef>
-                <a:spcPts val="0"/>
-              </a:spcBef>
-              <a:spcAft>
-                <a:spcPts val="0"/>
-              </a:spcAft>
-              <a:defRPr sz="2400" b="0" lang="pl-PL">
-                <a:solidFill>
-                  <a:srgbClr val="18232D"/>
-                </a:solidFill>
-                <a:latin typeface="FreeSans"/>
-              </a:defRPr>
-            </a:pPr>
-            <a:r>
-              <a:t>Wieloletnia historia dzienna.</a:t>
+              <a:t>Obliczenia z lokalnych plików JSON.</a:t>
             </a:r>
           </a:p>
         </p:txBody>
@@ -5096,7 +5055,7 @@
               </a:defRPr>
             </a:pPr>
             <a:r>
-              <a:t>Technical v1 — działający wzór punktów</a:t>
+              <a:t>Pobieranie historii — rzeczywiste wykonanie CLI</a:t>
             </a:r>
           </a:p>
         </p:txBody>
@@ -5274,7 +5233,7 @@
               </a:defRPr>
             </a:pPr>
             <a:r>
-              <a:t>3 / 5</a:t>
+              <a:t>3 / 9</a:t>
             </a:r>
           </a:p>
         </p:txBody>
@@ -5287,8 +5246,8 @@
         </p:nvSpPr>
         <p:spPr>
           <a:xfrm>
-            <a:off x="658368" y="1536192"/>
-            <a:ext cx="13313664" cy="566928"/>
+            <a:off x="658368" y="1563624"/>
+            <a:ext cx="13313664" cy="475488"/>
           </a:xfrm>
           <a:prstGeom prst="rect">
             <a:avLst/>
@@ -5303,37 +5262,62 @@
           <a:p>
             <a:pPr algn="l">
               <a:lnSpc>
-                <a:spcPts val="3479"/>
-              </a:lnSpc>
-              <a:spcBef>
-                <a:spcPts val="0"/>
-              </a:spcBef>
-              <a:spcAft>
-                <a:spcPts val="0"/>
-              </a:spcAft>
-              <a:defRPr sz="3000" b="1" lang="pl-PL">
-                <a:solidFill>
-                  <a:srgbClr val="243B53"/>
-                </a:solidFill>
-                <a:latin typeface="FreeSans"/>
-              </a:defRPr>
-            </a:pPr>
-            <a:r>
-              <a:t>technical_score = punkty sezonowości + punkty trendu</a:t>
-            </a:r>
-          </a:p>
-        </p:txBody>
-      </p:sp>
-      <p:sp>
-        <p:nvSpPr>
-          <p:cNvPr id="8" name="TextBox 7"/>
-          <p:cNvSpPr txBox="1"/>
-          <p:nvPr/>
-        </p:nvSpPr>
-        <p:spPr>
-          <a:xfrm>
-            <a:off x="658368" y="2121408"/>
-            <a:ext cx="13313664" cy="429768"/>
+                <a:spcPts val="3015"/>
+              </a:lnSpc>
+              <a:spcBef>
+                <a:spcPts val="0"/>
+              </a:spcBef>
+              <a:spcAft>
+                <a:spcPts val="0"/>
+              </a:spcAft>
+              <a:defRPr sz="2600" b="0" lang="pl-PL">
+                <a:solidFill>
+                  <a:srgbClr val="18232D"/>
+                </a:solidFill>
+                <a:latin typeface="FreeSans"/>
+              </a:defRPr>
+            </a:pPr>
+            <a:r>
+              <a:t>Wycinek logów history z 14.10.2026: pobrano 20/20 historii spółek WIG20.</a:t>
+            </a:r>
+          </a:p>
+        </p:txBody>
+      </p:sp>
+      <p:pic>
+        <p:nvPicPr>
+          <p:cNvPr id="8" name="Oryginalny zrzut history: liczba świec, zakres dat, pominięcia i podsumowanie 20/20" descr="Oryginalny zrzut history: liczba świec, zakres dat, pominięcia i podsumowanie 20/20"/>
+          <p:cNvPicPr>
+            <a:picLocks noChangeAspect="1"/>
+          </p:cNvPicPr>
+          <p:nvPr/>
+        </p:nvPicPr>
+        <p:blipFill>
+          <a:blip r:embed="rId2"/>
+          <a:srcRect t="82769" r="29448"/>
+          <a:stretch>
+            <a:fillRect/>
+          </a:stretch>
+        </p:blipFill>
+        <p:spPr>
+          <a:xfrm>
+            <a:off x="658368" y="2313432"/>
+            <a:ext cx="13313664" cy="3313944"/>
+          </a:xfrm>
+          <a:prstGeom prst="rect">
+            <a:avLst/>
+          </a:prstGeom>
+        </p:spPr>
+      </p:pic>
+      <p:sp>
+        <p:nvSpPr>
+          <p:cNvPr id="9" name="TextBox 8"/>
+          <p:cNvSpPr txBox="1"/>
+          <p:nvPr/>
+        </p:nvSpPr>
+        <p:spPr>
+          <a:xfrm>
+            <a:off x="658368" y="5879592"/>
+            <a:ext cx="13313664" cy="466344"/>
           </a:xfrm>
           <a:prstGeom prst="rect">
             <a:avLst/>
@@ -5356,7 +5340,7 @@
               <a:spcAft>
                 <a:spcPts val="0"/>
               </a:spcAft>
-              <a:defRPr sz="2500" b="0" lang="pl-PL">
+              <a:defRPr sz="2500" b="1" lang="pl-PL">
                 <a:solidFill>
                   <a:srgbClr val="18232D"/>
                 </a:solidFill>
@@ -5364,21 +5348,21 @@
               </a:defRPr>
             </a:pPr>
             <a:r>
-              <a:t>Każdy składnik: −1, 0 albo +1; pełny wynik: −2 do +2; bez wag 0,5.</a:t>
-            </a:r>
-          </a:p>
-        </p:txBody>
-      </p:sp>
-      <p:sp>
-        <p:nvSpPr>
-          <p:cNvPr id="9" name="TextBox 8"/>
-          <p:cNvSpPr txBox="1"/>
-          <p:nvPr/>
-        </p:nvSpPr>
-        <p:spPr>
-          <a:xfrm>
-            <a:off x="658368" y="2633472"/>
-            <a:ext cx="13313664" cy="393192"/>
+              <a:t>Na logach: liczba świec, zakres dat, zapis do archiwum i raport pominięć.</a:t>
+            </a:r>
+          </a:p>
+        </p:txBody>
+      </p:sp>
+      <p:sp>
+        <p:nvSpPr>
+          <p:cNvPr id="10" name="TextBox 9"/>
+          <p:cNvSpPr txBox="1"/>
+          <p:nvPr/>
+        </p:nvSpPr>
+        <p:spPr>
+          <a:xfrm>
+            <a:off x="658368" y="6537960"/>
+            <a:ext cx="6446520" cy="1124712"/>
           </a:xfrm>
           <a:prstGeom prst="rect">
             <a:avLst/>
@@ -5393,15 +5377,15 @@
           <a:p>
             <a:pPr algn="l">
               <a:lnSpc>
-                <a:spcPts val="2668"/>
-              </a:lnSpc>
-              <a:spcBef>
-                <a:spcPts val="0"/>
-              </a:spcBef>
-              <a:spcAft>
-                <a:spcPts val="0"/>
-              </a:spcAft>
-              <a:defRPr sz="2300" b="0" lang="pl-PL">
+                <a:spcPts val="2783"/>
+              </a:lnSpc>
+              <a:spcBef>
+                <a:spcPts val="0"/>
+              </a:spcBef>
+              <a:spcAft>
+                <a:spcPts val="0"/>
+              </a:spcAft>
+              <a:defRPr sz="2400" b="0" lang="pl-PL">
                 <a:solidFill>
                   <a:srgbClr val="18232D"/>
                 </a:solidFill>
@@ -5409,21 +5393,29 @@
               </a:defRPr>
             </a:pPr>
             <a:r>
-              <a:t>Dane dzienne: close, nie adjusted_close; świece sprzed daty rankingu.</a:t>
-            </a:r>
-          </a:p>
-        </p:txBody>
-      </p:sp>
-      <p:sp>
-        <p:nvSpPr>
-          <p:cNvPr id="10" name="TextBox 9"/>
-          <p:cNvSpPr txBox="1"/>
-          <p:nvPr/>
-        </p:nvSpPr>
-        <p:spPr>
-          <a:xfrm>
-            <a:off x="658368" y="3163824"/>
-            <a:ext cx="7498079" cy="530352"/>
+              <a:t>Surowa odpowiedź jest zachowana.</a:t>
+            </a:r>
+            <a:br/>
+            <a:r>
+              <a:t>Wadliwe lub niepełne świece trafiają do</a:t>
+            </a:r>
+            <a:br/>
+            <a:r>
+              <a:t>skipped_candles.</a:t>
+            </a:r>
+          </a:p>
+        </p:txBody>
+      </p:sp>
+      <p:sp>
+        <p:nvSpPr>
+          <p:cNvPr id="11" name="TextBox 10"/>
+          <p:cNvSpPr txBox="1"/>
+          <p:nvPr/>
+        </p:nvSpPr>
+        <p:spPr>
+          <a:xfrm>
+            <a:off x="7671816" y="6537960"/>
+            <a:ext cx="6281928" cy="1124712"/>
           </a:xfrm>
           <a:prstGeom prst="rect">
             <a:avLst/>
@@ -5438,60 +5430,15 @@
           <a:p>
             <a:pPr algn="l">
               <a:lnSpc>
-                <a:spcPts val="3131"/>
-              </a:lnSpc>
-              <a:spcBef>
-                <a:spcPts val="0"/>
-              </a:spcBef>
-              <a:spcAft>
-                <a:spcPts val="0"/>
-              </a:spcAft>
-              <a:defRPr sz="2700" b="1" lang="pl-PL">
-                <a:solidFill>
-                  <a:srgbClr val="243B53"/>
-                </a:solidFill>
-                <a:latin typeface="FreeSans"/>
-              </a:defRPr>
-            </a:pPr>
-            <a:r>
-              <a:t>Sezonowość — miesiąc daty rankingu</a:t>
-            </a:r>
-          </a:p>
-        </p:txBody>
-      </p:sp>
-      <p:sp>
-        <p:nvSpPr>
-          <p:cNvPr id="11" name="TextBox 10"/>
-          <p:cNvSpPr txBox="1"/>
-          <p:nvPr/>
-        </p:nvSpPr>
-        <p:spPr>
-          <a:xfrm>
-            <a:off x="658368" y="3785615"/>
-            <a:ext cx="7498079" cy="804672"/>
-          </a:xfrm>
-          <a:prstGeom prst="rect">
-            <a:avLst/>
-          </a:prstGeom>
-          <a:noFill/>
-        </p:spPr>
-        <p:txBody>
-          <a:bodyPr wrap="square" lIns="0" rIns="0" tIns="0" bIns="0" anchor="t">
-            <a:noAutofit/>
-          </a:bodyPr>
-          <a:lstStyle/>
-          <a:p>
-            <a:pPr algn="l">
-              <a:lnSpc>
-                <a:spcPts val="2899"/>
-              </a:lnSpc>
-              <a:spcBef>
-                <a:spcPts val="0"/>
-              </a:spcBef>
-              <a:spcAft>
-                <a:spcPts val="0"/>
-              </a:spcAft>
-              <a:defRPr sz="2500" b="0" lang="pl-PL">
+                <a:spcPts val="2783"/>
+              </a:lnSpc>
+              <a:spcBef>
+                <a:spcPts val="0"/>
+              </a:spcBef>
+              <a:spcAft>
+                <a:spcPts val="0"/>
+              </a:spcAft>
+              <a:defRPr sz="2400" b="0" lang="pl-PL">
                 <a:solidFill>
                   <a:srgbClr val="18232D"/>
                 </a:solidFill>
@@ -5499,524 +5446,15 @@
               </a:defRPr>
             </a:pPr>
             <a:r>
-              <a:t>Zakończone miesiące z lat ubiegłych;</a:t>
+              <a:t>Luki pozostają lukami.</a:t>
             </a:r>
             <a:br/>
             <a:r>
-              <a:t>ten sam miesiąc kalendarzowy co data rankingu.</a:t>
-            </a:r>
-          </a:p>
-        </p:txBody>
-      </p:sp>
-      <p:sp>
-        <p:nvSpPr>
-          <p:cNvPr id="12" name="TextBox 11"/>
-          <p:cNvSpPr txBox="1"/>
-          <p:nvPr/>
-        </p:nvSpPr>
-        <p:spPr>
-          <a:xfrm>
-            <a:off x="658368" y="4745736"/>
-            <a:ext cx="7498079" cy="804672"/>
-          </a:xfrm>
-          <a:prstGeom prst="rect">
-            <a:avLst/>
-          </a:prstGeom>
-          <a:noFill/>
-        </p:spPr>
-        <p:txBody>
-          <a:bodyPr wrap="square" lIns="0" rIns="0" tIns="0" bIns="0" anchor="t">
-            <a:noAutofit/>
-          </a:bodyPr>
-          <a:lstStyle/>
-          <a:p>
-            <a:pPr algn="l">
-              <a:lnSpc>
-                <a:spcPts val="2899"/>
-              </a:lnSpc>
-              <a:spcBef>
-                <a:spcPts val="0"/>
-              </a:spcBef>
-              <a:spcAft>
-                <a:spcPts val="0"/>
-              </a:spcAft>
-              <a:defRPr sz="2500" b="0" lang="pl-PL">
-                <a:solidFill>
-                  <a:srgbClr val="18232D"/>
-                </a:solidFill>
-                <a:latin typeface="FreeSans"/>
-              </a:defRPr>
-            </a:pPr>
-            <a:r>
-              <a:t>Zwrot = ostatni close tego miesiąca /</a:t>
+              <a:t>Importer nie dopisuje sztucznych sesji ani</a:t>
             </a:r>
             <a:br/>
             <a:r>
-              <a:t>ostatni close poprzedniego miesiąca − 1.</a:t>
-            </a:r>
-          </a:p>
-        </p:txBody>
-      </p:sp>
-      <p:sp>
-        <p:nvSpPr>
-          <p:cNvPr id="13" name="TextBox 12"/>
-          <p:cNvSpPr txBox="1"/>
-          <p:nvPr/>
-        </p:nvSpPr>
-        <p:spPr>
-          <a:xfrm>
-            <a:off x="658368" y="5687568"/>
-            <a:ext cx="7498079" cy="466344"/>
-          </a:xfrm>
-          <a:prstGeom prst="rect">
-            <a:avLst/>
-          </a:prstGeom>
-          <a:noFill/>
-        </p:spPr>
-        <p:txBody>
-          <a:bodyPr wrap="square" lIns="0" rIns="0" tIns="0" bIns="0" anchor="t">
-            <a:noAutofit/>
-          </a:bodyPr>
-          <a:lstStyle/>
-          <a:p>
-            <a:pPr algn="l">
-              <a:lnSpc>
-                <a:spcPts val="2783"/>
-              </a:lnSpc>
-              <a:spcBef>
-                <a:spcPts val="0"/>
-              </a:spcBef>
-              <a:spcAft>
-                <a:spcPts val="0"/>
-              </a:spcAft>
-              <a:defRPr sz="2400" b="0" lang="pl-PL">
-                <a:solidFill>
-                  <a:srgbClr val="18232D"/>
-                </a:solidFill>
-                <a:latin typeface="FreeSans"/>
-              </a:defRPr>
-            </a:pPr>
-            <a:r>
-              <a:t>R = średnia zwrotów z całej dostępnej historii.</a:t>
-            </a:r>
-          </a:p>
-        </p:txBody>
-      </p:sp>
-      <p:sp>
-        <p:nvSpPr>
-          <p:cNvPr id="14" name="TextBox 13"/>
-          <p:cNvSpPr txBox="1"/>
-          <p:nvPr/>
-        </p:nvSpPr>
-        <p:spPr>
-          <a:xfrm>
-            <a:off x="658368" y="6309360"/>
-            <a:ext cx="7498079" cy="484632"/>
-          </a:xfrm>
-          <a:prstGeom prst="rect">
-            <a:avLst/>
-          </a:prstGeom>
-          <a:noFill/>
-        </p:spPr>
-        <p:txBody>
-          <a:bodyPr wrap="square" lIns="0" rIns="0" tIns="0" bIns="0" anchor="t">
-            <a:noAutofit/>
-          </a:bodyPr>
-          <a:lstStyle/>
-          <a:p>
-            <a:pPr algn="l">
-              <a:lnSpc>
-                <a:spcPts val="3131"/>
-              </a:lnSpc>
-              <a:spcBef>
-                <a:spcPts val="0"/>
-              </a:spcBef>
-              <a:spcAft>
-                <a:spcPts val="0"/>
-              </a:spcAft>
-              <a:defRPr sz="2700" b="1" lang="pl-PL">
-                <a:solidFill>
-                  <a:srgbClr val="18232D"/>
-                </a:solidFill>
-                <a:latin typeface="FreeSans"/>
-              </a:defRPr>
-            </a:pPr>
-            <a:r>
-              <a:t>R &gt; 2% → +1 | R &lt; −2% → −1</a:t>
-            </a:r>
-          </a:p>
-        </p:txBody>
-      </p:sp>
-      <p:sp>
-        <p:nvSpPr>
-          <p:cNvPr id="15" name="TextBox 14"/>
-          <p:cNvSpPr txBox="1"/>
-          <p:nvPr/>
-        </p:nvSpPr>
-        <p:spPr>
-          <a:xfrm>
-            <a:off x="658368" y="6894576"/>
-            <a:ext cx="7498079" cy="438912"/>
-          </a:xfrm>
-          <a:prstGeom prst="rect">
-            <a:avLst/>
-          </a:prstGeom>
-          <a:noFill/>
-        </p:spPr>
-        <p:txBody>
-          <a:bodyPr wrap="square" lIns="0" rIns="0" tIns="0" bIns="0" anchor="t">
-            <a:noAutofit/>
-          </a:bodyPr>
-          <a:lstStyle/>
-          <a:p>
-            <a:pPr algn="l">
-              <a:lnSpc>
-                <a:spcPts val="2783"/>
-              </a:lnSpc>
-              <a:spcBef>
-                <a:spcPts val="0"/>
-              </a:spcBef>
-              <a:spcAft>
-                <a:spcPts val="0"/>
-              </a:spcAft>
-              <a:defRPr sz="2400" b="0" lang="pl-PL">
-                <a:solidFill>
-                  <a:srgbClr val="18232D"/>
-                </a:solidFill>
-                <a:latin typeface="FreeSans"/>
-              </a:defRPr>
-            </a:pPr>
-            <a:r>
-              <a:t>Inaczej 0 (także dokładnie przy ±2%).</a:t>
-            </a:r>
-          </a:p>
-        </p:txBody>
-      </p:sp>
-      <p:sp>
-        <p:nvSpPr>
-          <p:cNvPr id="16" name="TextBox 15"/>
-          <p:cNvSpPr txBox="1"/>
-          <p:nvPr/>
-        </p:nvSpPr>
-        <p:spPr>
-          <a:xfrm>
-            <a:off x="8641080" y="3163824"/>
-            <a:ext cx="5330952" cy="530352"/>
-          </a:xfrm>
-          <a:prstGeom prst="rect">
-            <a:avLst/>
-          </a:prstGeom>
-          <a:noFill/>
-        </p:spPr>
-        <p:txBody>
-          <a:bodyPr wrap="square" lIns="0" rIns="0" tIns="0" bIns="0" anchor="t">
-            <a:noAutofit/>
-          </a:bodyPr>
-          <a:lstStyle/>
-          <a:p>
-            <a:pPr algn="l">
-              <a:lnSpc>
-                <a:spcPts val="3131"/>
-              </a:lnSpc>
-              <a:spcBef>
-                <a:spcPts val="0"/>
-              </a:spcBef>
-              <a:spcAft>
-                <a:spcPts val="0"/>
-              </a:spcAft>
-              <a:defRPr sz="2700" b="1" lang="pl-PL">
-                <a:solidFill>
-                  <a:srgbClr val="243B53"/>
-                </a:solidFill>
-                <a:latin typeface="FreeSans"/>
-              </a:defRPr>
-            </a:pPr>
-            <a:r>
-              <a:t>Trend — SMA200</a:t>
-            </a:r>
-          </a:p>
-        </p:txBody>
-      </p:sp>
-      <p:sp>
-        <p:nvSpPr>
-          <p:cNvPr id="17" name="TextBox 16"/>
-          <p:cNvSpPr txBox="1"/>
-          <p:nvPr/>
-        </p:nvSpPr>
-        <p:spPr>
-          <a:xfrm>
-            <a:off x="8641080" y="3785615"/>
-            <a:ext cx="5330952" cy="813816"/>
-          </a:xfrm>
-          <a:prstGeom prst="rect">
-            <a:avLst/>
-          </a:prstGeom>
-          <a:noFill/>
-        </p:spPr>
-        <p:txBody>
-          <a:bodyPr wrap="square" lIns="0" rIns="0" tIns="0" bIns="0" anchor="t">
-            <a:noAutofit/>
-          </a:bodyPr>
-          <a:lstStyle/>
-          <a:p>
-            <a:pPr algn="l">
-              <a:lnSpc>
-                <a:spcPts val="2783"/>
-              </a:lnSpc>
-              <a:spcBef>
-                <a:spcPts val="0"/>
-              </a:spcBef>
-              <a:spcAft>
-                <a:spcPts val="0"/>
-              </a:spcAft>
-              <a:defRPr sz="2400" b="0" lang="pl-PL">
-                <a:solidFill>
-                  <a:srgbClr val="18232D"/>
-                </a:solidFill>
-                <a:latin typeface="FreeSans"/>
-              </a:defRPr>
-            </a:pPr>
-            <a:r>
-              <a:t>Średnia z ostatnich 200 close.</a:t>
-            </a:r>
-            <a:br/>
-            <a:r>
-              <a:t>Odchylenie od SMA200 &lt; 3% → 0.</a:t>
-            </a:r>
-          </a:p>
-        </p:txBody>
-      </p:sp>
-      <p:sp>
-        <p:nvSpPr>
-          <p:cNvPr id="18" name="TextBox 17"/>
-          <p:cNvSpPr txBox="1"/>
-          <p:nvPr/>
-        </p:nvSpPr>
-        <p:spPr>
-          <a:xfrm>
-            <a:off x="8641080" y="4754880"/>
-            <a:ext cx="5330952" cy="1124712"/>
-          </a:xfrm>
-          <a:prstGeom prst="rect">
-            <a:avLst/>
-          </a:prstGeom>
-          <a:noFill/>
-        </p:spPr>
-        <p:txBody>
-          <a:bodyPr wrap="square" lIns="0" rIns="0" tIns="0" bIns="0" anchor="t">
-            <a:noAutofit/>
-          </a:bodyPr>
-          <a:lstStyle/>
-          <a:p>
-            <a:pPr algn="l">
-              <a:lnSpc>
-                <a:spcPts val="2783"/>
-              </a:lnSpc>
-              <a:spcBef>
-                <a:spcPts val="0"/>
-              </a:spcBef>
-              <a:spcAft>
-                <a:spcPts val="0"/>
-              </a:spcAft>
-              <a:defRPr sz="2400" b="0" lang="pl-PL">
-                <a:solidFill>
-                  <a:srgbClr val="18232D"/>
-                </a:solidFill>
-                <a:latin typeface="FreeSans"/>
-              </a:defRPr>
-            </a:pPr>
-            <a:r>
-              <a:t>Na granicy 3% i poza pasem:</a:t>
-            </a:r>
-            <a:br/>
-            <a:r>
-              <a:t>powyżej SMA200 → +1;</a:t>
-            </a:r>
-            <a:br/>
-            <a:r>
-              <a:t>poniżej SMA200 → −1.</a:t>
-            </a:r>
-          </a:p>
-        </p:txBody>
-      </p:sp>
-      <p:sp>
-        <p:nvSpPr>
-          <p:cNvPr id="19" name="TextBox 18"/>
-          <p:cNvSpPr txBox="1"/>
-          <p:nvPr/>
-        </p:nvSpPr>
-        <p:spPr>
-          <a:xfrm>
-            <a:off x="8641080" y="6062472"/>
-            <a:ext cx="5330952" cy="438912"/>
-          </a:xfrm>
-          <a:prstGeom prst="rect">
-            <a:avLst/>
-          </a:prstGeom>
-          <a:noFill/>
-        </p:spPr>
-        <p:txBody>
-          <a:bodyPr wrap="square" lIns="0" rIns="0" tIns="0" bIns="0" anchor="t">
-            <a:noAutofit/>
-          </a:bodyPr>
-          <a:lstStyle/>
-          <a:p>
-            <a:pPr algn="l">
-              <a:lnSpc>
-                <a:spcPts val="2899"/>
-              </a:lnSpc>
-              <a:spcBef>
-                <a:spcPts val="0"/>
-              </a:spcBef>
-              <a:spcAft>
-                <a:spcPts val="0"/>
-              </a:spcAft>
-              <a:defRPr sz="2500" b="0" lang="pl-PL">
-                <a:solidFill>
-                  <a:srgbClr val="18232D"/>
-                </a:solidFill>
-                <a:latin typeface="FreeSans"/>
-              </a:defRPr>
-            </a:pPr>
-            <a:r>
-              <a:t>Mniej niż 200 sesji → trend 0.</a:t>
-            </a:r>
-          </a:p>
-        </p:txBody>
-      </p:sp>
-      <p:sp>
-        <p:nvSpPr>
-          <p:cNvPr id="20" name="TextBox 19"/>
-          <p:cNvSpPr txBox="1"/>
-          <p:nvPr/>
-        </p:nvSpPr>
-        <p:spPr>
-          <a:xfrm>
-            <a:off x="8641080" y="6611112"/>
-            <a:ext cx="5330952" cy="758952"/>
-          </a:xfrm>
-          <a:prstGeom prst="rect">
-            <a:avLst/>
-          </a:prstGeom>
-          <a:noFill/>
-        </p:spPr>
-        <p:txBody>
-          <a:bodyPr wrap="square" lIns="0" rIns="0" tIns="0" bIns="0" anchor="t">
-            <a:noAutofit/>
-          </a:bodyPr>
-          <a:lstStyle/>
-          <a:p>
-            <a:pPr algn="l">
-              <a:lnSpc>
-                <a:spcPts val="2783"/>
-              </a:lnSpc>
-              <a:spcBef>
-                <a:spcPts val="0"/>
-              </a:spcBef>
-              <a:spcAft>
-                <a:spcPts val="0"/>
-              </a:spcAft>
-              <a:defRPr sz="2400" b="0" lang="pl-PL">
-                <a:solidFill>
-                  <a:srgbClr val="18232D"/>
-                </a:solidFill>
-                <a:latin typeface="FreeSans"/>
-              </a:defRPr>
-            </a:pPr>
-            <a:r>
-              <a:t>technical-table: history.json</a:t>
-            </a:r>
-            <a:br/>
-            <a:r>
-              <a:t>z katalogu → ranking offline.</a:t>
-            </a:r>
-          </a:p>
-        </p:txBody>
-      </p:sp>
-      <p:sp>
-        <p:nvSpPr>
-          <p:cNvPr id="21" name="Rectangle 20"/>
-          <p:cNvSpPr/>
-          <p:nvPr/>
-        </p:nvSpPr>
-        <p:spPr>
-          <a:xfrm>
-            <a:off x="658368" y="7388352"/>
-            <a:ext cx="13313664" cy="457200"/>
-          </a:xfrm>
-          <a:prstGeom prst="rect">
-            <a:avLst/>
-          </a:prstGeom>
-          <a:solidFill>
-            <a:srgbClr val="F2F5F7"/>
-          </a:solidFill>
-          <a:ln>
-            <a:noFill/>
-          </a:ln>
-        </p:spPr>
-        <p:style>
-          <a:lnRef idx="1">
-            <a:schemeClr val="accent1"/>
-          </a:lnRef>
-          <a:fillRef idx="3">
-            <a:schemeClr val="accent1"/>
-          </a:fillRef>
-          <a:effectRef idx="2">
-            <a:schemeClr val="accent1"/>
-          </a:effectRef>
-          <a:fontRef idx="minor">
-            <a:schemeClr val="lt1"/>
-          </a:fontRef>
-        </p:style>
-        <p:txBody>
-          <a:bodyPr rtlCol="0" anchor="ctr"/>
-          <a:lstStyle/>
-          <a:p>
-            <a:pPr algn="ctr"/>
-          </a:p>
-        </p:txBody>
-      </p:sp>
-      <p:sp>
-        <p:nvSpPr>
-          <p:cNvPr id="22" name="TextBox 21"/>
-          <p:cNvSpPr txBox="1"/>
-          <p:nvPr/>
-        </p:nvSpPr>
-        <p:spPr>
-          <a:xfrm>
-            <a:off x="804672" y="7406640"/>
-            <a:ext cx="13021056" cy="402336"/>
-          </a:xfrm>
-          <a:prstGeom prst="rect">
-            <a:avLst/>
-          </a:prstGeom>
-          <a:noFill/>
-        </p:spPr>
-        <p:txBody>
-          <a:bodyPr wrap="square" lIns="0" rIns="0" tIns="0" bIns="0" anchor="t">
-            <a:noAutofit/>
-          </a:bodyPr>
-          <a:lstStyle/>
-          <a:p>
-            <a:pPr algn="l">
-              <a:lnSpc>
-                <a:spcPts val="2783"/>
-              </a:lnSpc>
-              <a:spcBef>
-                <a:spcPts val="0"/>
-              </a:spcBef>
-              <a:spcAft>
-                <a:spcPts val="0"/>
-              </a:spcAft>
-              <a:defRPr sz="2400" b="1" lang="pl-PL">
-                <a:solidFill>
-                  <a:srgbClr val="18232D"/>
-                </a:solidFill>
-                <a:latin typeface="FreeSans"/>
-              </a:defRPr>
-            </a:pPr>
-            <a:r>
-              <a:t>0 zakończonych miesięcy → sezonowość i technical_score = null.</a:t>
+              <a:t>cen.</a:t>
             </a:r>
           </a:p>
         </p:txBody>
@@ -6087,7 +5525,7 @@
               </a:defRPr>
             </a:pPr>
             <a:r>
-              <a:t>Problem, na którym się zatrzymujemy</a:t>
+              <a:t>Technical v1 — sezonowość miesiąca</a:t>
             </a:r>
           </a:p>
         </p:txBody>
@@ -6265,7 +5703,7 @@
               </a:defRPr>
             </a:pPr>
             <a:r>
-              <a:t>4 / 5</a:t>
+              <a:t>4 / 9</a:t>
             </a:r>
           </a:p>
         </p:txBody>
@@ -6278,8 +5716,8 @@
         </p:nvSpPr>
         <p:spPr>
           <a:xfrm>
-            <a:off x="658368" y="1545336"/>
-            <a:ext cx="13313664" cy="493776"/>
+            <a:off x="658368" y="1554480"/>
+            <a:ext cx="13313664" cy="557784"/>
           </a:xfrm>
           <a:prstGeom prst="rect">
             <a:avLst/>
@@ -6294,6 +5732,96 @@
           <a:p>
             <a:pPr algn="l">
               <a:lnSpc>
+                <a:spcPts val="3479"/>
+              </a:lnSpc>
+              <a:spcBef>
+                <a:spcPts val="0"/>
+              </a:spcBef>
+              <a:spcAft>
+                <a:spcPts val="0"/>
+              </a:spcAft>
+              <a:defRPr sz="3000" b="1" lang="pl-PL">
+                <a:solidFill>
+                  <a:srgbClr val="243B53"/>
+                </a:solidFill>
+                <a:latin typeface="FreeSans"/>
+              </a:defRPr>
+            </a:pPr>
+            <a:r>
+              <a:t>technical_score = punkty sezonowości + punkty trendu</a:t>
+            </a:r>
+          </a:p>
+        </p:txBody>
+      </p:sp>
+      <p:sp>
+        <p:nvSpPr>
+          <p:cNvPr id="8" name="TextBox 7"/>
+          <p:cNvSpPr txBox="1"/>
+          <p:nvPr/>
+        </p:nvSpPr>
+        <p:spPr>
+          <a:xfrm>
+            <a:off x="658368" y="2249424"/>
+            <a:ext cx="13313664" cy="448056"/>
+          </a:xfrm>
+          <a:prstGeom prst="rect">
+            <a:avLst/>
+          </a:prstGeom>
+          <a:noFill/>
+        </p:spPr>
+        <p:txBody>
+          <a:bodyPr wrap="square" lIns="0" rIns="0" tIns="0" bIns="0" anchor="t">
+            <a:noAutofit/>
+          </a:bodyPr>
+          <a:lstStyle/>
+          <a:p>
+            <a:pPr algn="l">
+              <a:lnSpc>
+                <a:spcPts val="2899"/>
+              </a:lnSpc>
+              <a:spcBef>
+                <a:spcPts val="0"/>
+              </a:spcBef>
+              <a:spcAft>
+                <a:spcPts val="0"/>
+              </a:spcAft>
+              <a:defRPr sz="2500" b="0" lang="pl-PL">
+                <a:solidFill>
+                  <a:srgbClr val="18232D"/>
+                </a:solidFill>
+                <a:latin typeface="FreeSans"/>
+              </a:defRPr>
+            </a:pPr>
+            <a:r>
+              <a:t>Każdy składnik: −1, 0 albo +1; pełny wynik: −2 do +2; bez wag 0,5 i momentum.</a:t>
+            </a:r>
+          </a:p>
+        </p:txBody>
+      </p:sp>
+      <p:sp>
+        <p:nvSpPr>
+          <p:cNvPr id="9" name="TextBox 8"/>
+          <p:cNvSpPr txBox="1"/>
+          <p:nvPr/>
+        </p:nvSpPr>
+        <p:spPr>
+          <a:xfrm>
+            <a:off x="658368" y="2980944"/>
+            <a:ext cx="7351775" cy="521207"/>
+          </a:xfrm>
+          <a:prstGeom prst="rect">
+            <a:avLst/>
+          </a:prstGeom>
+          <a:noFill/>
+        </p:spPr>
+        <p:txBody>
+          <a:bodyPr wrap="square" lIns="0" rIns="0" tIns="0" bIns="0" anchor="t">
+            <a:noAutofit/>
+          </a:bodyPr>
+          <a:lstStyle/>
+          <a:p>
+            <a:pPr algn="l">
+              <a:lnSpc>
                 <a:spcPts val="3131"/>
               </a:lnSpc>
               <a:spcBef>
@@ -6302,7 +5830,52 @@
               <a:spcAft>
                 <a:spcPts val="0"/>
               </a:spcAft>
-              <a:defRPr sz="2700" b="0" lang="pl-PL">
+              <a:defRPr sz="2700" b="1" lang="pl-PL">
+                <a:solidFill>
+                  <a:srgbClr val="243B53"/>
+                </a:solidFill>
+                <a:latin typeface="FreeSans"/>
+              </a:defRPr>
+            </a:pPr>
+            <a:r>
+              <a:t>Które miesiące wchodzą do obliczeń?</a:t>
+            </a:r>
+          </a:p>
+        </p:txBody>
+      </p:sp>
+      <p:sp>
+        <p:nvSpPr>
+          <p:cNvPr id="10" name="TextBox 9"/>
+          <p:cNvSpPr txBox="1"/>
+          <p:nvPr/>
+        </p:nvSpPr>
+        <p:spPr>
+          <a:xfrm>
+            <a:off x="658368" y="3685032"/>
+            <a:ext cx="7351775" cy="1170432"/>
+          </a:xfrm>
+          <a:prstGeom prst="rect">
+            <a:avLst/>
+          </a:prstGeom>
+          <a:noFill/>
+        </p:spPr>
+        <p:txBody>
+          <a:bodyPr wrap="square" lIns="0" rIns="0" tIns="0" bIns="0" anchor="t">
+            <a:noAutofit/>
+          </a:bodyPr>
+          <a:lstStyle/>
+          <a:p>
+            <a:pPr algn="l">
+              <a:lnSpc>
+                <a:spcPts val="2899"/>
+              </a:lnSpc>
+              <a:spcBef>
+                <a:spcPts val="0"/>
+              </a:spcBef>
+              <a:spcAft>
+                <a:spcPts val="0"/>
+              </a:spcAft>
+              <a:defRPr sz="2500" b="0" lang="pl-PL">
                 <a:solidFill>
                   <a:srgbClr val="18232D"/>
                 </a:solidFill>
@@ -6310,21 +5883,29 @@
               </a:defRPr>
             </a:pPr>
             <a:r>
-              <a:t>fundamental-table: pięć wskaźników z jednego raportu, bez punktów.</a:t>
-            </a:r>
-          </a:p>
-        </p:txBody>
-      </p:sp>
-      <p:sp>
-        <p:nvSpPr>
-          <p:cNvPr id="8" name="TextBox 7"/>
-          <p:cNvSpPr txBox="1"/>
-          <p:nvPr/>
-        </p:nvSpPr>
-        <p:spPr>
-          <a:xfrm>
-            <a:off x="658368" y="2139696"/>
-            <a:ext cx="13313664" cy="411480"/>
+              <a:t>Miesiąc kalendarzowy daty rankingu.</a:t>
+            </a:r>
+            <a:br/>
+            <a:r>
+              <a:t>Tylko zakończone takie miesiące z lat ubiegłych.</a:t>
+            </a:r>
+            <a:br/>
+            <a:r>
+              <a:t>Bieżący miesiąc pozostaje poza średnią.</a:t>
+            </a:r>
+          </a:p>
+        </p:txBody>
+      </p:sp>
+      <p:sp>
+        <p:nvSpPr>
+          <p:cNvPr id="11" name="TextBox 10"/>
+          <p:cNvSpPr txBox="1"/>
+          <p:nvPr/>
+        </p:nvSpPr>
+        <p:spPr>
+          <a:xfrm>
+            <a:off x="658368" y="5138928"/>
+            <a:ext cx="7351775" cy="868680"/>
           </a:xfrm>
           <a:prstGeom prst="rect">
             <a:avLst/>
@@ -6339,15 +5920,15 @@
           <a:p>
             <a:pPr algn="l">
               <a:lnSpc>
-                <a:spcPts val="2668"/>
-              </a:lnSpc>
-              <a:spcBef>
-                <a:spcPts val="0"/>
-              </a:spcBef>
-              <a:spcAft>
-                <a:spcPts val="0"/>
-              </a:spcAft>
-              <a:defRPr sz="2300" b="0" lang="pl-PL">
+                <a:spcPts val="2899"/>
+              </a:lnSpc>
+              <a:spcBef>
+                <a:spcPts val="0"/>
+              </a:spcBef>
+              <a:spcAft>
+                <a:spcPts val="0"/>
+              </a:spcAft>
+              <a:defRPr sz="2500" b="0" lang="pl-PL">
                 <a:solidFill>
                   <a:srgbClr val="18232D"/>
                 </a:solidFill>
@@ -6355,21 +5936,25 @@
               </a:defRPr>
             </a:pPr>
             <a:r>
-              <a:t>net_margin · operating_margin · equity_ratio · debt_to_equity · ocf_to_net_income</a:t>
-            </a:r>
-          </a:p>
-        </p:txBody>
-      </p:sp>
-      <p:sp>
-        <p:nvSpPr>
-          <p:cNvPr id="9" name="TextBox 8"/>
-          <p:cNvSpPr txBox="1"/>
-          <p:nvPr/>
-        </p:nvSpPr>
-        <p:spPr>
-          <a:xfrm>
-            <a:off x="658368" y="2724912"/>
-            <a:ext cx="13313664" cy="438912"/>
+              <a:t>Zwrot = ostatni close tego miesiąca /</a:t>
+            </a:r>
+            <a:br/>
+            <a:r>
+              <a:t>ostatni close poprzedniego miesiąca − 1.</a:t>
+            </a:r>
+          </a:p>
+        </p:txBody>
+      </p:sp>
+      <p:sp>
+        <p:nvSpPr>
+          <p:cNvPr id="12" name="TextBox 11"/>
+          <p:cNvSpPr txBox="1"/>
+          <p:nvPr/>
+        </p:nvSpPr>
+        <p:spPr>
+          <a:xfrm>
+            <a:off x="658368" y="6245352"/>
+            <a:ext cx="7351775" cy="841248"/>
           </a:xfrm>
           <a:prstGeom prst="rect">
             <a:avLst/>
@@ -6384,15 +5969,15 @@
           <a:p>
             <a:pPr algn="l">
               <a:lnSpc>
-                <a:spcPts val="2899"/>
-              </a:lnSpc>
-              <a:spcBef>
-                <a:spcPts val="0"/>
-              </a:spcBef>
-              <a:spcAft>
-                <a:spcPts val="0"/>
-              </a:spcAft>
-              <a:defRPr sz="2500" b="0" lang="pl-PL">
+                <a:spcPts val="2783"/>
+              </a:lnSpc>
+              <a:spcBef>
+                <a:spcPts val="0"/>
+              </a:spcBef>
+              <a:spcAft>
+                <a:spcPts val="0"/>
+              </a:spcAft>
+              <a:defRPr sz="2400" b="0" lang="pl-PL">
                 <a:solidFill>
                   <a:srgbClr val="18232D"/>
                 </a:solidFill>
@@ -6400,21 +5985,25 @@
               </a:defRPr>
             </a:pPr>
             <a:r>
-              <a:t>Brak danych lub dzielenie przez zero → null, nigdy zastępcze 0.</a:t>
-            </a:r>
-          </a:p>
-        </p:txBody>
-      </p:sp>
-      <p:sp>
-        <p:nvSpPr>
-          <p:cNvPr id="10" name="TextBox 9"/>
-          <p:cNvSpPr txBox="1"/>
-          <p:nvPr/>
-        </p:nvSpPr>
-        <p:spPr>
-          <a:xfrm>
-            <a:off x="658368" y="3474720"/>
-            <a:ext cx="6446520" cy="566928"/>
+              <a:t>R: średnia z całej dostępnej historii.</a:t>
+            </a:r>
+            <a:br/>
+            <a:r>
+              <a:t>Bez ceny poprzedniego miesiąca para jest pomijana.</a:t>
+            </a:r>
+          </a:p>
+        </p:txBody>
+      </p:sp>
+      <p:sp>
+        <p:nvSpPr>
+          <p:cNvPr id="13" name="TextBox 12"/>
+          <p:cNvSpPr txBox="1"/>
+          <p:nvPr/>
+        </p:nvSpPr>
+        <p:spPr>
+          <a:xfrm>
+            <a:off x="8458200" y="2980944"/>
+            <a:ext cx="5486400" cy="521207"/>
           </a:xfrm>
           <a:prstGeom prst="rect">
             <a:avLst/>
@@ -6429,15 +6018,15 @@
           <a:p>
             <a:pPr algn="l">
               <a:lnSpc>
-                <a:spcPts val="3247"/>
-              </a:lnSpc>
-              <a:spcBef>
-                <a:spcPts val="0"/>
-              </a:spcBef>
-              <a:spcAft>
-                <a:spcPts val="0"/>
-              </a:spcAft>
-              <a:defRPr sz="2800" b="1" lang="pl-PL">
+                <a:spcPts val="3015"/>
+              </a:lnSpc>
+              <a:spcBef>
+                <a:spcPts val="0"/>
+              </a:spcBef>
+              <a:spcAft>
+                <a:spcPts val="0"/>
+              </a:spcAft>
+              <a:defRPr sz="2600" b="1" lang="pl-PL">
                 <a:solidFill>
                   <a:srgbClr val="243B53"/>
                 </a:solidFill>
@@ -6445,21 +6034,21 @@
               </a:defRPr>
             </a:pPr>
             <a:r>
-              <a:t>Dlaczego nie kopiujemy ±2%</a:t>
-            </a:r>
-          </a:p>
-        </p:txBody>
-      </p:sp>
-      <p:sp>
-        <p:nvSpPr>
-          <p:cNvPr id="11" name="TextBox 10"/>
-          <p:cNvSpPr txBox="1"/>
-          <p:nvPr/>
-        </p:nvSpPr>
-        <p:spPr>
-          <a:xfrm>
-            <a:off x="658368" y="4178808"/>
-            <a:ext cx="6446520" cy="438912"/>
+              <a:t>Średni zwrot → punkty</a:t>
+            </a:r>
+          </a:p>
+        </p:txBody>
+      </p:sp>
+      <p:sp>
+        <p:nvSpPr>
+          <p:cNvPr id="14" name="TextBox 13"/>
+          <p:cNvSpPr txBox="1"/>
+          <p:nvPr/>
+        </p:nvSpPr>
+        <p:spPr>
+          <a:xfrm>
+            <a:off x="8458200" y="3712463"/>
+            <a:ext cx="5486400" cy="502920"/>
           </a:xfrm>
           <a:prstGeom prst="rect">
             <a:avLst/>
@@ -6474,6 +6063,145 @@
           <a:p>
             <a:pPr algn="l">
               <a:lnSpc>
+                <a:spcPts val="3131"/>
+              </a:lnSpc>
+              <a:spcBef>
+                <a:spcPts val="0"/>
+              </a:spcBef>
+              <a:spcAft>
+                <a:spcPts val="0"/>
+              </a:spcAft>
+              <a:defRPr sz="2700" b="1" lang="pl-PL">
+                <a:solidFill>
+                  <a:srgbClr val="18232D"/>
+                </a:solidFill>
+                <a:latin typeface="FreeSans"/>
+              </a:defRPr>
+            </a:pPr>
+            <a:r>
+              <a:t>R &gt; 2% → +1</a:t>
+            </a:r>
+          </a:p>
+        </p:txBody>
+      </p:sp>
+      <p:sp>
+        <p:nvSpPr>
+          <p:cNvPr id="15" name="TextBox 14"/>
+          <p:cNvSpPr txBox="1"/>
+          <p:nvPr/>
+        </p:nvSpPr>
+        <p:spPr>
+          <a:xfrm>
+            <a:off x="8458200" y="4352544"/>
+            <a:ext cx="5486400" cy="502920"/>
+          </a:xfrm>
+          <a:prstGeom prst="rect">
+            <a:avLst/>
+          </a:prstGeom>
+          <a:noFill/>
+        </p:spPr>
+        <p:txBody>
+          <a:bodyPr wrap="square" lIns="0" rIns="0" tIns="0" bIns="0" anchor="t">
+            <a:noAutofit/>
+          </a:bodyPr>
+          <a:lstStyle/>
+          <a:p>
+            <a:pPr algn="l">
+              <a:lnSpc>
+                <a:spcPts val="3131"/>
+              </a:lnSpc>
+              <a:spcBef>
+                <a:spcPts val="0"/>
+              </a:spcBef>
+              <a:spcAft>
+                <a:spcPts val="0"/>
+              </a:spcAft>
+              <a:defRPr sz="2700" b="1" lang="pl-PL">
+                <a:solidFill>
+                  <a:srgbClr val="18232D"/>
+                </a:solidFill>
+                <a:latin typeface="FreeSans"/>
+              </a:defRPr>
+            </a:pPr>
+            <a:r>
+              <a:t>R &lt; −2% → −1</a:t>
+            </a:r>
+          </a:p>
+        </p:txBody>
+      </p:sp>
+      <p:sp>
+        <p:nvSpPr>
+          <p:cNvPr id="16" name="TextBox 15"/>
+          <p:cNvSpPr txBox="1"/>
+          <p:nvPr/>
+        </p:nvSpPr>
+        <p:spPr>
+          <a:xfrm>
+            <a:off x="8458200" y="4992624"/>
+            <a:ext cx="5486400" cy="868680"/>
+          </a:xfrm>
+          <a:prstGeom prst="rect">
+            <a:avLst/>
+          </a:prstGeom>
+          <a:noFill/>
+        </p:spPr>
+        <p:txBody>
+          <a:bodyPr wrap="square" lIns="0" rIns="0" tIns="0" bIns="0" anchor="t">
+            <a:noAutofit/>
+          </a:bodyPr>
+          <a:lstStyle/>
+          <a:p>
+            <a:pPr algn="l">
+              <a:lnSpc>
+                <a:spcPts val="3131"/>
+              </a:lnSpc>
+              <a:spcBef>
+                <a:spcPts val="0"/>
+              </a:spcBef>
+              <a:spcAft>
+                <a:spcPts val="0"/>
+              </a:spcAft>
+              <a:defRPr sz="2700" b="1" lang="pl-PL">
+                <a:solidFill>
+                  <a:srgbClr val="18232D"/>
+                </a:solidFill>
+                <a:latin typeface="FreeSans"/>
+              </a:defRPr>
+            </a:pPr>
+            <a:r>
+              <a:t>Pozostałe → 0</a:t>
+            </a:r>
+            <a:br/>
+            <a:r>
+              <a:t>(także przy dokładnie ±2%).</a:t>
+            </a:r>
+          </a:p>
+        </p:txBody>
+      </p:sp>
+      <p:sp>
+        <p:nvSpPr>
+          <p:cNvPr id="17" name="TextBox 16"/>
+          <p:cNvSpPr txBox="1"/>
+          <p:nvPr/>
+        </p:nvSpPr>
+        <p:spPr>
+          <a:xfrm>
+            <a:off x="8458200" y="6053328"/>
+            <a:ext cx="5486400" cy="1234440"/>
+          </a:xfrm>
+          <a:prstGeom prst="rect">
+            <a:avLst/>
+          </a:prstGeom>
+          <a:noFill/>
+        </p:spPr>
+        <p:txBody>
+          <a:bodyPr wrap="square" lIns="0" rIns="0" tIns="0" bIns="0" anchor="t">
+            <a:noAutofit/>
+          </a:bodyPr>
+          <a:lstStyle/>
+          <a:p>
+            <a:pPr algn="l">
+              <a:lnSpc>
                 <a:spcPts val="2783"/>
               </a:lnSpc>
               <a:spcBef>
@@ -6490,297 +6218,15 @@
               </a:defRPr>
             </a:pPr>
             <a:r>
-              <a:t>Sezonowość mierzy zwrot wokół zera.</a:t>
-            </a:r>
-          </a:p>
-        </p:txBody>
-      </p:sp>
-      <p:sp>
-        <p:nvSpPr>
-          <p:cNvPr id="12" name="TextBox 11"/>
-          <p:cNvSpPr txBox="1"/>
-          <p:nvPr/>
-        </p:nvSpPr>
-        <p:spPr>
-          <a:xfrm>
-            <a:off x="658368" y="4773168"/>
-            <a:ext cx="6446520" cy="1124712"/>
-          </a:xfrm>
-          <a:prstGeom prst="rect">
-            <a:avLst/>
-          </a:prstGeom>
-          <a:noFill/>
-        </p:spPr>
-        <p:txBody>
-          <a:bodyPr wrap="square" lIns="0" rIns="0" tIns="0" bIns="0" anchor="t">
-            <a:noAutofit/>
-          </a:bodyPr>
-          <a:lstStyle/>
-          <a:p>
-            <a:pPr algn="l">
-              <a:lnSpc>
-                <a:spcPts val="2783"/>
-              </a:lnSpc>
-              <a:spcBef>
-                <a:spcPts val="0"/>
-              </a:spcBef>
-              <a:spcAft>
-                <a:spcPts val="0"/>
-              </a:spcAft>
-              <a:defRPr sz="2400" b="0" lang="pl-PL">
-                <a:solidFill>
-                  <a:srgbClr val="18232D"/>
-                </a:solidFill>
-                <a:latin typeface="FreeSans"/>
-              </a:defRPr>
-            </a:pPr>
-            <a:r>
-              <a:t>Przykłady: marża 10%, kapitał/aktywa 0,40.</a:t>
+              <a:t>Wystarczy jeden historyczny miesiąc.</a:t>
             </a:r>
             <a:br/>
             <a:r>
-              <a:t>To nie jest „prawie zero”; pas ±2%</a:t>
+              <a:t>Zero użytecznych miesięcy → null</a:t>
             </a:r>
             <a:br/>
             <a:r>
-              <a:t>niemal każdej spółce niefinansowej dałby +1.</a:t>
-            </a:r>
-          </a:p>
-        </p:txBody>
-      </p:sp>
-      <p:sp>
-        <p:nvSpPr>
-          <p:cNvPr id="13" name="TextBox 12"/>
-          <p:cNvSpPr txBox="1"/>
-          <p:nvPr/>
-        </p:nvSpPr>
-        <p:spPr>
-          <a:xfrm>
-            <a:off x="658368" y="6126480"/>
-            <a:ext cx="6446520" cy="804672"/>
-          </a:xfrm>
-          <a:prstGeom prst="rect">
-            <a:avLst/>
-          </a:prstGeom>
-          <a:noFill/>
-        </p:spPr>
-        <p:txBody>
-          <a:bodyPr wrap="square" lIns="0" rIns="0" tIns="0" bIns="0" anchor="t">
-            <a:noAutofit/>
-          </a:bodyPr>
-          <a:lstStyle/>
-          <a:p>
-            <a:pPr algn="l">
-              <a:lnSpc>
-                <a:spcPts val="2783"/>
-              </a:lnSpc>
-              <a:spcBef>
-                <a:spcPts val="0"/>
-              </a:spcBef>
-              <a:spcAft>
-                <a:spcPts val="0"/>
-              </a:spcAft>
-              <a:defRPr sz="2400" b="1" lang="pl-PL">
-                <a:solidFill>
-                  <a:srgbClr val="18232D"/>
-                </a:solidFill>
-                <a:latin typeface="FreeSans"/>
-              </a:defRPr>
-            </a:pPr>
-            <a:r>
-              <a:t>Dług działa odwrotnie:</a:t>
-            </a:r>
-            <a:br/>
-            <a:r>
-              <a:t>wyższe debt_to_equity → gorzej.</a:t>
-            </a:r>
-          </a:p>
-        </p:txBody>
-      </p:sp>
-      <p:sp>
-        <p:nvSpPr>
-          <p:cNvPr id="14" name="TextBox 13"/>
-          <p:cNvSpPr txBox="1"/>
-          <p:nvPr/>
-        </p:nvSpPr>
-        <p:spPr>
-          <a:xfrm>
-            <a:off x="7680960" y="3474720"/>
-            <a:ext cx="6272784" cy="566928"/>
-          </a:xfrm>
-          <a:prstGeom prst="rect">
-            <a:avLst/>
-          </a:prstGeom>
-          <a:noFill/>
-        </p:spPr>
-        <p:txBody>
-          <a:bodyPr wrap="square" lIns="0" rIns="0" tIns="0" bIns="0" anchor="t">
-            <a:noAutofit/>
-          </a:bodyPr>
-          <a:lstStyle/>
-          <a:p>
-            <a:pPr algn="l">
-              <a:lnSpc>
-                <a:spcPts val="3131"/>
-              </a:lnSpc>
-              <a:spcBef>
-                <a:spcPts val="0"/>
-              </a:spcBef>
-              <a:spcAft>
-                <a:spcPts val="0"/>
-              </a:spcAft>
-              <a:defRPr sz="2700" b="1" lang="pl-PL">
-                <a:solidFill>
-                  <a:srgbClr val="243B53"/>
-                </a:solidFill>
-                <a:latin typeface="FreeSans"/>
-              </a:defRPr>
-            </a:pPr>
-            <a:r>
-              <a:t>Czego wskaźniki nie pokrywają</a:t>
-            </a:r>
-          </a:p>
-        </p:txBody>
-      </p:sp>
-      <p:sp>
-        <p:nvSpPr>
-          <p:cNvPr id="15" name="TextBox 14"/>
-          <p:cNvSpPr txBox="1"/>
-          <p:nvPr/>
-        </p:nvSpPr>
-        <p:spPr>
-          <a:xfrm>
-            <a:off x="7680960" y="4178808"/>
-            <a:ext cx="6272784" cy="804672"/>
-          </a:xfrm>
-          <a:prstGeom prst="rect">
-            <a:avLst/>
-          </a:prstGeom>
-          <a:noFill/>
-        </p:spPr>
-        <p:txBody>
-          <a:bodyPr wrap="square" lIns="0" rIns="0" tIns="0" bIns="0" anchor="t">
-            <a:noAutofit/>
-          </a:bodyPr>
-          <a:lstStyle/>
-          <a:p>
-            <a:pPr algn="l">
-              <a:lnSpc>
-                <a:spcPts val="2783"/>
-              </a:lnSpc>
-              <a:spcBef>
-                <a:spcPts val="0"/>
-              </a:spcBef>
-              <a:spcAft>
-                <a:spcPts val="0"/>
-              </a:spcAft>
-              <a:defRPr sz="2400" b="0" lang="pl-PL">
-                <a:solidFill>
-                  <a:srgbClr val="18232D"/>
-                </a:solidFill>
-                <a:latin typeface="FreeSans"/>
-              </a:defRPr>
-            </a:pPr>
-            <a:r>
-              <a:t>• Wycena: brak liczby akcji;</a:t>
-            </a:r>
-            <a:br/>
-            <a:r>
-              <a:t>brak P/E i P/B.</a:t>
-            </a:r>
-          </a:p>
-        </p:txBody>
-      </p:sp>
-      <p:sp>
-        <p:nvSpPr>
-          <p:cNvPr id="16" name="TextBox 15"/>
-          <p:cNvSpPr txBox="1"/>
-          <p:nvPr/>
-        </p:nvSpPr>
-        <p:spPr>
-          <a:xfrm>
-            <a:off x="7680960" y="5193792"/>
-            <a:ext cx="6272784" cy="804672"/>
-          </a:xfrm>
-          <a:prstGeom prst="rect">
-            <a:avLst/>
-          </a:prstGeom>
-          <a:noFill/>
-        </p:spPr>
-        <p:txBody>
-          <a:bodyPr wrap="square" lIns="0" rIns="0" tIns="0" bIns="0" anchor="t">
-            <a:noAutofit/>
-          </a:bodyPr>
-          <a:lstStyle/>
-          <a:p>
-            <a:pPr algn="l">
-              <a:lnSpc>
-                <a:spcPts val="2783"/>
-              </a:lnSpc>
-              <a:spcBef>
-                <a:spcPts val="0"/>
-              </a:spcBef>
-              <a:spcAft>
-                <a:spcPts val="0"/>
-              </a:spcAft>
-              <a:defRPr sz="2400" b="0" lang="pl-PL">
-                <a:solidFill>
-                  <a:srgbClr val="18232D"/>
-                </a:solidFill>
-                <a:latin typeface="FreeSans"/>
-              </a:defRPr>
-            </a:pPr>
-            <a:r>
-              <a:t>• Dynamika r/r: brak poprzedniego raportu.</a:t>
-            </a:r>
-          </a:p>
-        </p:txBody>
-      </p:sp>
-      <p:sp>
-        <p:nvSpPr>
-          <p:cNvPr id="17" name="TextBox 16"/>
-          <p:cNvSpPr txBox="1"/>
-          <p:nvPr/>
-        </p:nvSpPr>
-        <p:spPr>
-          <a:xfrm>
-            <a:off x="7680960" y="6035040"/>
-            <a:ext cx="6272784" cy="804672"/>
-          </a:xfrm>
-          <a:prstGeom prst="rect">
-            <a:avLst/>
-          </a:prstGeom>
-          <a:noFill/>
-        </p:spPr>
-        <p:txBody>
-          <a:bodyPr wrap="square" lIns="0" rIns="0" tIns="0" bIns="0" anchor="t">
-            <a:noAutofit/>
-          </a:bodyPr>
-          <a:lstStyle/>
-          <a:p>
-            <a:pPr algn="l">
-              <a:lnSpc>
-                <a:spcPts val="2783"/>
-              </a:lnSpc>
-              <a:spcBef>
-                <a:spcPts val="0"/>
-              </a:spcBef>
-              <a:spcAft>
-                <a:spcPts val="0"/>
-              </a:spcAft>
-              <a:defRPr sz="2400" b="0" lang="pl-PL">
-                <a:solidFill>
-                  <a:srgbClr val="18232D"/>
-                </a:solidFill>
-                <a:latin typeface="FreeSans"/>
-              </a:defRPr>
-            </a:pPr>
-            <a:r>
-              <a:t>• Banki: częsty brak przychodu w Notoria;</a:t>
-            </a:r>
-            <a:br/>
-            <a:r>
-              <a:t>marże = null.</a:t>
+              <a:t>sezonowości i całego technical_score.</a:t>
             </a:r>
           </a:p>
         </p:txBody>
@@ -6793,8 +6239,8 @@
         </p:nvSpPr>
         <p:spPr>
           <a:xfrm>
-            <a:off x="658368" y="7086600"/>
-            <a:ext cx="13313664" cy="786384"/>
+            <a:off x="658368" y="7351775"/>
+            <a:ext cx="13313664" cy="502920"/>
           </a:xfrm>
           <a:prstGeom prst="rect">
             <a:avLst/>
@@ -6836,8 +6282,8 @@
         </p:nvSpPr>
         <p:spPr>
           <a:xfrm>
-            <a:off x="804672" y="7114032"/>
-            <a:ext cx="13021056" cy="731520"/>
+            <a:off x="804672" y="7415783"/>
+            <a:ext cx="13021056" cy="393192"/>
           </a:xfrm>
           <a:prstGeom prst="rect">
             <a:avLst/>
@@ -6852,15 +6298,15 @@
           <a:p>
             <a:pPr algn="l">
               <a:lnSpc>
-                <a:spcPts val="2668"/>
-              </a:lnSpc>
-              <a:spcBef>
-                <a:spcPts val="0"/>
-              </a:spcBef>
-              <a:spcAft>
-                <a:spcPts val="0"/>
-              </a:spcAft>
-              <a:defRPr sz="2300" b="0" lang="pl-PL">
+                <a:spcPts val="2783"/>
+              </a:lnSpc>
+              <a:spcBef>
+                <a:spcPts val="0"/>
+              </a:spcBef>
+              <a:spcAft>
+                <a:spcPts val="0"/>
+              </a:spcAft>
+              <a:defRPr sz="2400" b="1" lang="pl-PL">
                 <a:solidFill>
                   <a:srgbClr val="18232D"/>
                 </a:solidFill>
@@ -6868,11 +6314,7 @@
               </a:defRPr>
             </a:pPr>
             <a:r>
-              <a:t>Przykład skali: 5 wskaźników → fundamental −5…+5; technical −2…+2.</a:t>
-            </a:r>
-            <a:br/>
-            <a:r>
-              <a:t>Waga fundamental &gt; technical: nieporównywalne punkty utrudniają interpretację sumy.</a:t>
+              <a:t>Dane: close, nie adjusted_close; wyłącznie świece z date &lt; as_of.</a:t>
             </a:r>
           </a:p>
         </p:txBody>
@@ -6943,7 +6385,7 @@
               </a:defRPr>
             </a:pPr>
             <a:r>
-              <a:t>Decyzja przed kolejnym kodem</a:t>
+              <a:t>Trend SMA200 i zbiorczy ranking technical</a:t>
             </a:r>
           </a:p>
         </p:txBody>
@@ -7121,7 +6563,2709 @@
               </a:defRPr>
             </a:pPr>
             <a:r>
-              <a:t>5 / 5</a:t>
+              <a:t>5 / 9</a:t>
+            </a:r>
+          </a:p>
+        </p:txBody>
+      </p:sp>
+      <p:sp>
+        <p:nvSpPr>
+          <p:cNvPr id="7" name="TextBox 6"/>
+          <p:cNvSpPr txBox="1"/>
+          <p:nvPr/>
+        </p:nvSpPr>
+        <p:spPr>
+          <a:xfrm>
+            <a:off x="658368" y="1554480"/>
+            <a:ext cx="13313664" cy="512064"/>
+          </a:xfrm>
+          <a:prstGeom prst="rect">
+            <a:avLst/>
+          </a:prstGeom>
+          <a:noFill/>
+        </p:spPr>
+        <p:txBody>
+          <a:bodyPr wrap="square" lIns="0" rIns="0" tIns="0" bIns="0" anchor="t">
+            <a:noAutofit/>
+          </a:bodyPr>
+          <a:lstStyle/>
+          <a:p>
+            <a:pPr algn="l">
+              <a:lnSpc>
+                <a:spcPts val="3131"/>
+              </a:lnSpc>
+              <a:spcBef>
+                <a:spcPts val="0"/>
+              </a:spcBef>
+              <a:spcAft>
+                <a:spcPts val="0"/>
+              </a:spcAft>
+              <a:defRPr sz="2700" b="0" lang="pl-PL">
+                <a:solidFill>
+                  <a:srgbClr val="18232D"/>
+                </a:solidFill>
+                <a:latin typeface="FreeSans"/>
+              </a:defRPr>
+            </a:pPr>
+            <a:r>
+              <a:t>SMA200: średnia ostatnich 200 dziennych close sprzed daty rankingu.</a:t>
+            </a:r>
+          </a:p>
+        </p:txBody>
+      </p:sp>
+      <p:sp>
+        <p:nvSpPr>
+          <p:cNvPr id="8" name="TextBox 7"/>
+          <p:cNvSpPr txBox="1"/>
+          <p:nvPr/>
+        </p:nvSpPr>
+        <p:spPr>
+          <a:xfrm>
+            <a:off x="658368" y="2176272"/>
+            <a:ext cx="13313664" cy="457200"/>
+          </a:xfrm>
+          <a:prstGeom prst="rect">
+            <a:avLst/>
+          </a:prstGeom>
+          <a:noFill/>
+        </p:spPr>
+        <p:txBody>
+          <a:bodyPr wrap="square" lIns="0" rIns="0" tIns="0" bIns="0" anchor="t">
+            <a:noAutofit/>
+          </a:bodyPr>
+          <a:lstStyle/>
+          <a:p>
+            <a:pPr algn="l">
+              <a:lnSpc>
+                <a:spcPts val="2899"/>
+              </a:lnSpc>
+              <a:spcBef>
+                <a:spcPts val="0"/>
+              </a:spcBef>
+              <a:spcAft>
+                <a:spcPts val="0"/>
+              </a:spcAft>
+              <a:defRPr sz="2500" b="0" lang="pl-PL">
+                <a:solidFill>
+                  <a:srgbClr val="18232D"/>
+                </a:solidFill>
+                <a:latin typeface="FreeSans"/>
+              </a:defRPr>
+            </a:pPr>
+            <a:r>
+              <a:t>d = |close − SMA200| / SMA200. d &lt; 3% → 0; przy ≥ 3%: powyżej → +1, poniżej → −1.</a:t>
+            </a:r>
+          </a:p>
+        </p:txBody>
+      </p:sp>
+      <p:sp>
+        <p:nvSpPr>
+          <p:cNvPr id="9" name="TextBox 8"/>
+          <p:cNvSpPr txBox="1"/>
+          <p:nvPr/>
+        </p:nvSpPr>
+        <p:spPr>
+          <a:xfrm>
+            <a:off x="658368" y="2816352"/>
+            <a:ext cx="13313664" cy="429768"/>
+          </a:xfrm>
+          <a:prstGeom prst="rect">
+            <a:avLst/>
+          </a:prstGeom>
+          <a:noFill/>
+        </p:spPr>
+        <p:txBody>
+          <a:bodyPr wrap="square" lIns="0" rIns="0" tIns="0" bIns="0" anchor="t">
+            <a:noAutofit/>
+          </a:bodyPr>
+          <a:lstStyle/>
+          <a:p>
+            <a:pPr algn="l">
+              <a:lnSpc>
+                <a:spcPts val="2783"/>
+              </a:lnSpc>
+              <a:spcBef>
+                <a:spcPts val="0"/>
+              </a:spcBef>
+              <a:spcAft>
+                <a:spcPts val="0"/>
+              </a:spcAft>
+              <a:defRPr sz="2400" b="0" lang="pl-PL">
+                <a:solidFill>
+                  <a:srgbClr val="18232D"/>
+                </a:solidFill>
+                <a:latin typeface="FreeSans"/>
+              </a:defRPr>
+            </a:pPr>
+            <a:r>
+              <a:t>Mniej niż 200 sesji → trend 0. Poniżej: wycinek rzeczywistego JSON z technical-table.</a:t>
+            </a:r>
+          </a:p>
+        </p:txBody>
+      </p:sp>
+      <p:pic>
+        <p:nvPicPr>
+          <p:cNvPr id="10" name="Oryginalny wycinek JSON technical-table z datą rankingu, składnikami, sumą i liczbą lat" descr="Oryginalny wycinek JSON technical-table z datą rankingu, składnikami, sumą i liczbą lat"/>
+          <p:cNvPicPr>
+            <a:picLocks noChangeAspect="1"/>
+          </p:cNvPicPr>
+          <p:nvPr/>
+        </p:nvPicPr>
+        <p:blipFill>
+          <a:blip r:embed="rId2"/>
+          <a:srcRect b="80595"/>
+          <a:stretch>
+            <a:fillRect/>
+          </a:stretch>
+        </p:blipFill>
+        <p:spPr>
+          <a:xfrm>
+            <a:off x="658368" y="3474720"/>
+            <a:ext cx="13313664" cy="3557961"/>
+          </a:xfrm>
+          <a:prstGeom prst="rect">
+            <a:avLst/>
+          </a:prstGeom>
+        </p:spPr>
+      </p:pic>
+      <p:sp>
+        <p:nvSpPr>
+          <p:cNvPr id="11" name="TextBox 10"/>
+          <p:cNvSpPr txBox="1"/>
+          <p:nvPr/>
+        </p:nvSpPr>
+        <p:spPr>
+          <a:xfrm>
+            <a:off x="658368" y="7269480"/>
+            <a:ext cx="13313664" cy="566928"/>
+          </a:xfrm>
+          <a:prstGeom prst="rect">
+            <a:avLst/>
+          </a:prstGeom>
+          <a:noFill/>
+        </p:spPr>
+        <p:txBody>
+          <a:bodyPr wrap="square" lIns="0" rIns="0" tIns="0" bIns="0" anchor="t">
+            <a:noAutofit/>
+          </a:bodyPr>
+          <a:lstStyle/>
+          <a:p>
+            <a:pPr algn="l">
+              <a:lnSpc>
+                <a:spcPts val="2668"/>
+              </a:lnSpc>
+              <a:spcBef>
+                <a:spcPts val="0"/>
+              </a:spcBef>
+              <a:spcAft>
+                <a:spcPts val="0"/>
+              </a:spcAft>
+              <a:defRPr sz="2300" b="0" lang="pl-PL">
+                <a:solidFill>
+                  <a:srgbClr val="18232D"/>
+                </a:solidFill>
+                <a:latin typeface="FreeSans"/>
+              </a:defRPr>
+            </a:pPr>
+            <a:r>
+              <a:t>Najnowszy fetched_at na spółkę; sort malejąco po wyniku, null na końcu, remisy A–Z.</a:t>
+            </a:r>
+          </a:p>
+        </p:txBody>
+      </p:sp>
+    </p:spTree>
+  </p:cSld>
+  <p:clrMapOvr>
+    <a:masterClrMapping/>
+  </p:clrMapOvr>
+</p:sld>
+</file>
+
+<file path=ppt/slides/slide6.xml><?xml version="1.0" encoding="utf-8"?>
+<p:sld xmlns:a="http://schemas.openxmlformats.org/drawingml/2006/main" xmlns:p="http://schemas.openxmlformats.org/presentationml/2006/main" xmlns:r="http://schemas.openxmlformats.org/officeDocument/2006/relationships">
+  <p:cSld>
+    <p:bg>
+      <p:bgPr>
+        <a:solidFill>
+          <a:srgbClr val="FFFFFF"/>
+        </a:solidFill>
+        <a:effectLst/>
+      </p:bgPr>
+    </p:bg>
+    <p:spTree>
+      <p:nvGrpSpPr>
+        <p:cNvPr id="1" name=""/>
+        <p:cNvGrpSpPr/>
+        <p:nvPr/>
+      </p:nvGrpSpPr>
+      <p:grpSpPr/>
+      <p:sp>
+        <p:nvSpPr>
+          <p:cNvPr id="2" name="TextBox 1"/>
+          <p:cNvSpPr txBox="1"/>
+          <p:nvPr/>
+        </p:nvSpPr>
+        <p:spPr>
+          <a:xfrm>
+            <a:off x="658368" y="438912"/>
+            <a:ext cx="13313664" cy="731520"/>
+          </a:xfrm>
+          <a:prstGeom prst="rect">
+            <a:avLst/>
+          </a:prstGeom>
+          <a:noFill/>
+        </p:spPr>
+        <p:txBody>
+          <a:bodyPr wrap="square" lIns="0" rIns="0" tIns="0" bIns="0" anchor="t">
+            <a:noAutofit/>
+          </a:bodyPr>
+          <a:lstStyle/>
+          <a:p>
+            <a:pPr algn="l">
+              <a:lnSpc>
+                <a:spcPts val="4640"/>
+              </a:lnSpc>
+              <a:spcBef>
+                <a:spcPts val="0"/>
+              </a:spcBef>
+              <a:spcAft>
+                <a:spcPts val="0"/>
+              </a:spcAft>
+              <a:defRPr sz="4000" b="1" lang="pl-PL">
+                <a:solidFill>
+                  <a:srgbClr val="243B53"/>
+                </a:solidFill>
+                <a:latin typeface="FreeSans"/>
+              </a:defRPr>
+            </a:pPr>
+            <a:r>
+              <a:t>Fundamenty — pięć wskaźników z jednego raportu</a:t>
+            </a:r>
+          </a:p>
+        </p:txBody>
+      </p:sp>
+      <p:sp>
+        <p:nvSpPr>
+          <p:cNvPr id="3" name="Rectangle 2"/>
+          <p:cNvSpPr/>
+          <p:nvPr/>
+        </p:nvSpPr>
+        <p:spPr>
+          <a:xfrm>
+            <a:off x="658368" y="1280160"/>
+            <a:ext cx="13313664" cy="16459"/>
+          </a:xfrm>
+          <a:prstGeom prst="rect">
+            <a:avLst/>
+          </a:prstGeom>
+          <a:solidFill>
+            <a:srgbClr val="CDD5DC"/>
+          </a:solidFill>
+          <a:ln>
+            <a:noFill/>
+          </a:ln>
+        </p:spPr>
+        <p:style>
+          <a:lnRef idx="1">
+            <a:schemeClr val="accent1"/>
+          </a:lnRef>
+          <a:fillRef idx="3">
+            <a:schemeClr val="accent1"/>
+          </a:fillRef>
+          <a:effectRef idx="2">
+            <a:schemeClr val="accent1"/>
+          </a:effectRef>
+          <a:fontRef idx="minor">
+            <a:schemeClr val="lt1"/>
+          </a:fontRef>
+        </p:style>
+        <p:txBody>
+          <a:bodyPr rtlCol="0" anchor="ctr"/>
+          <a:lstStyle/>
+          <a:p>
+            <a:pPr algn="ctr"/>
+          </a:p>
+        </p:txBody>
+      </p:sp>
+      <p:sp>
+        <p:nvSpPr>
+          <p:cNvPr id="4" name="TextBox 3"/>
+          <p:cNvSpPr txBox="1"/>
+          <p:nvPr/>
+        </p:nvSpPr>
+        <p:spPr>
+          <a:xfrm>
+            <a:off x="658368" y="7900416"/>
+            <a:ext cx="6400800" cy="283464"/>
+          </a:xfrm>
+          <a:prstGeom prst="rect">
+            <a:avLst/>
+          </a:prstGeom>
+          <a:noFill/>
+        </p:spPr>
+        <p:txBody>
+          <a:bodyPr wrap="square" lIns="0" rIns="0" tIns="0" bIns="0" anchor="t">
+            <a:noAutofit/>
+          </a:bodyPr>
+          <a:lstStyle/>
+          <a:p>
+            <a:pPr algn="l">
+              <a:lnSpc>
+                <a:spcPts val="1739"/>
+              </a:lnSpc>
+              <a:spcBef>
+                <a:spcPts val="0"/>
+              </a:spcBef>
+              <a:spcAft>
+                <a:spcPts val="0"/>
+              </a:spcAft>
+              <a:defRPr sz="1500" b="0" lang="pl-PL">
+                <a:solidFill>
+                  <a:srgbClr val="4C5B67"/>
+                </a:solidFill>
+                <a:latin typeface="FreeSans"/>
+              </a:defRPr>
+            </a:pPr>
+            <a:r>
+              <a:t>Marek Karbarz · postęp pracy inżynierskiej</a:t>
+            </a:r>
+          </a:p>
+        </p:txBody>
+      </p:sp>
+      <p:sp>
+        <p:nvSpPr>
+          <p:cNvPr id="5" name="TextBox 4"/>
+          <p:cNvSpPr txBox="1"/>
+          <p:nvPr/>
+        </p:nvSpPr>
+        <p:spPr>
+          <a:xfrm>
+            <a:off x="9418320" y="7900416"/>
+            <a:ext cx="2743200" cy="283464"/>
+          </a:xfrm>
+          <a:prstGeom prst="rect">
+            <a:avLst/>
+          </a:prstGeom>
+          <a:noFill/>
+        </p:spPr>
+        <p:txBody>
+          <a:bodyPr wrap="square" lIns="0" rIns="0" tIns="0" bIns="0" anchor="t">
+            <a:noAutofit/>
+          </a:bodyPr>
+          <a:lstStyle/>
+          <a:p>
+            <a:pPr algn="r">
+              <a:lnSpc>
+                <a:spcPts val="1739"/>
+              </a:lnSpc>
+              <a:spcBef>
+                <a:spcPts val="0"/>
+              </a:spcBef>
+              <a:spcAft>
+                <a:spcPts val="0"/>
+              </a:spcAft>
+              <a:defRPr sz="1500" b="0" lang="pl-PL">
+                <a:solidFill>
+                  <a:srgbClr val="4C5B67"/>
+                </a:solidFill>
+                <a:latin typeface="FreeSans"/>
+              </a:defRPr>
+            </a:pPr>
+            <a:r>
+              <a:t>14.10.2026</a:t>
+            </a:r>
+          </a:p>
+        </p:txBody>
+      </p:sp>
+      <p:sp>
+        <p:nvSpPr>
+          <p:cNvPr id="6" name="TextBox 5"/>
+          <p:cNvSpPr txBox="1"/>
+          <p:nvPr/>
+        </p:nvSpPr>
+        <p:spPr>
+          <a:xfrm>
+            <a:off x="12847320" y="7900416"/>
+            <a:ext cx="1097280" cy="283464"/>
+          </a:xfrm>
+          <a:prstGeom prst="rect">
+            <a:avLst/>
+          </a:prstGeom>
+          <a:noFill/>
+        </p:spPr>
+        <p:txBody>
+          <a:bodyPr wrap="square" lIns="0" rIns="0" tIns="0" bIns="0" anchor="t">
+            <a:noAutofit/>
+          </a:bodyPr>
+          <a:lstStyle/>
+          <a:p>
+            <a:pPr algn="r">
+              <a:lnSpc>
+                <a:spcPts val="1739"/>
+              </a:lnSpc>
+              <a:spcBef>
+                <a:spcPts val="0"/>
+              </a:spcBef>
+              <a:spcAft>
+                <a:spcPts val="0"/>
+              </a:spcAft>
+              <a:defRPr sz="1500" b="0" lang="pl-PL">
+                <a:solidFill>
+                  <a:srgbClr val="4C5B67"/>
+                </a:solidFill>
+                <a:latin typeface="FreeSans"/>
+              </a:defRPr>
+            </a:pPr>
+            <a:r>
+              <a:t>6 / 9</a:t>
+            </a:r>
+          </a:p>
+        </p:txBody>
+      </p:sp>
+      <p:sp>
+        <p:nvSpPr>
+          <p:cNvPr id="7" name="TextBox 6"/>
+          <p:cNvSpPr txBox="1"/>
+          <p:nvPr/>
+        </p:nvSpPr>
+        <p:spPr>
+          <a:xfrm>
+            <a:off x="658368" y="1554480"/>
+            <a:ext cx="13313664" cy="530352"/>
+          </a:xfrm>
+          <a:prstGeom prst="rect">
+            <a:avLst/>
+          </a:prstGeom>
+          <a:noFill/>
+        </p:spPr>
+        <p:txBody>
+          <a:bodyPr wrap="square" lIns="0" rIns="0" tIns="0" bIns="0" anchor="t">
+            <a:noAutofit/>
+          </a:bodyPr>
+          <a:lstStyle/>
+          <a:p>
+            <a:pPr algn="l">
+              <a:lnSpc>
+                <a:spcPts val="3015"/>
+              </a:lnSpc>
+              <a:spcBef>
+                <a:spcPts val="0"/>
+              </a:spcBef>
+              <a:spcAft>
+                <a:spcPts val="0"/>
+              </a:spcAft>
+              <a:defRPr sz="2600" b="0" lang="pl-PL">
+                <a:solidFill>
+                  <a:srgbClr val="18232D"/>
+                </a:solidFill>
+                <a:latin typeface="FreeSans"/>
+              </a:defRPr>
+            </a:pPr>
+            <a:r>
+              <a:t>fundamental-table oblicza relacje finansowe; jeszcze nie przypisuje punktów.</a:t>
+            </a:r>
+          </a:p>
+        </p:txBody>
+      </p:sp>
+      <p:sp>
+        <p:nvSpPr>
+          <p:cNvPr id="8" name="TextBox 7"/>
+          <p:cNvSpPr txBox="1"/>
+          <p:nvPr/>
+        </p:nvSpPr>
+        <p:spPr>
+          <a:xfrm>
+            <a:off x="786384" y="2240280"/>
+            <a:ext cx="3273552" cy="402336"/>
+          </a:xfrm>
+          <a:prstGeom prst="rect">
+            <a:avLst/>
+          </a:prstGeom>
+          <a:noFill/>
+        </p:spPr>
+        <p:txBody>
+          <a:bodyPr wrap="square" lIns="0" rIns="0" tIns="0" bIns="0" anchor="t">
+            <a:noAutofit/>
+          </a:bodyPr>
+          <a:lstStyle/>
+          <a:p>
+            <a:pPr algn="l">
+              <a:lnSpc>
+                <a:spcPts val="2783"/>
+              </a:lnSpc>
+              <a:spcBef>
+                <a:spcPts val="0"/>
+              </a:spcBef>
+              <a:spcAft>
+                <a:spcPts val="0"/>
+              </a:spcAft>
+              <a:defRPr sz="2400" b="1" lang="pl-PL">
+                <a:solidFill>
+                  <a:srgbClr val="4C5B67"/>
+                </a:solidFill>
+                <a:latin typeface="FreeSans"/>
+              </a:defRPr>
+            </a:pPr>
+            <a:r>
+              <a:t>Wskaźnik</a:t>
+            </a:r>
+          </a:p>
+        </p:txBody>
+      </p:sp>
+      <p:sp>
+        <p:nvSpPr>
+          <p:cNvPr id="9" name="TextBox 8"/>
+          <p:cNvSpPr txBox="1"/>
+          <p:nvPr/>
+        </p:nvSpPr>
+        <p:spPr>
+          <a:xfrm>
+            <a:off x="4389120" y="2240280"/>
+            <a:ext cx="9409176" cy="402336"/>
+          </a:xfrm>
+          <a:prstGeom prst="rect">
+            <a:avLst/>
+          </a:prstGeom>
+          <a:noFill/>
+        </p:spPr>
+        <p:txBody>
+          <a:bodyPr wrap="square" lIns="0" rIns="0" tIns="0" bIns="0" anchor="t">
+            <a:noAutofit/>
+          </a:bodyPr>
+          <a:lstStyle/>
+          <a:p>
+            <a:pPr algn="l">
+              <a:lnSpc>
+                <a:spcPts val="2783"/>
+              </a:lnSpc>
+              <a:spcBef>
+                <a:spcPts val="0"/>
+              </a:spcBef>
+              <a:spcAft>
+                <a:spcPts val="0"/>
+              </a:spcAft>
+              <a:defRPr sz="2400" b="1" lang="pl-PL">
+                <a:solidFill>
+                  <a:srgbClr val="4C5B67"/>
+                </a:solidFill>
+                <a:latin typeface="FreeSans"/>
+              </a:defRPr>
+            </a:pPr>
+            <a:r>
+              <a:t>Sposób obliczenia i znaczenie</a:t>
+            </a:r>
+          </a:p>
+        </p:txBody>
+      </p:sp>
+      <p:sp>
+        <p:nvSpPr>
+          <p:cNvPr id="10" name="Rectangle 9"/>
+          <p:cNvSpPr/>
+          <p:nvPr/>
+        </p:nvSpPr>
+        <p:spPr>
+          <a:xfrm>
+            <a:off x="658368" y="2770632"/>
+            <a:ext cx="13313664" cy="658368"/>
+          </a:xfrm>
+          <a:prstGeom prst="rect">
+            <a:avLst/>
+          </a:prstGeom>
+          <a:solidFill>
+            <a:srgbClr val="F2F5F7"/>
+          </a:solidFill>
+          <a:ln>
+            <a:noFill/>
+          </a:ln>
+        </p:spPr>
+        <p:style>
+          <a:lnRef idx="1">
+            <a:schemeClr val="accent1"/>
+          </a:lnRef>
+          <a:fillRef idx="3">
+            <a:schemeClr val="accent1"/>
+          </a:fillRef>
+          <a:effectRef idx="2">
+            <a:schemeClr val="accent1"/>
+          </a:effectRef>
+          <a:fontRef idx="minor">
+            <a:schemeClr val="lt1"/>
+          </a:fontRef>
+        </p:style>
+        <p:txBody>
+          <a:bodyPr rtlCol="0" anchor="ctr"/>
+          <a:lstStyle/>
+          <a:p>
+            <a:pPr algn="ctr"/>
+          </a:p>
+        </p:txBody>
+      </p:sp>
+      <p:sp>
+        <p:nvSpPr>
+          <p:cNvPr id="11" name="TextBox 10"/>
+          <p:cNvSpPr txBox="1"/>
+          <p:nvPr/>
+        </p:nvSpPr>
+        <p:spPr>
+          <a:xfrm>
+            <a:off x="786384" y="2880360"/>
+            <a:ext cx="3465576" cy="429768"/>
+          </a:xfrm>
+          <a:prstGeom prst="rect">
+            <a:avLst/>
+          </a:prstGeom>
+          <a:noFill/>
+        </p:spPr>
+        <p:txBody>
+          <a:bodyPr wrap="square" lIns="0" rIns="0" tIns="0" bIns="0" anchor="t">
+            <a:noAutofit/>
+          </a:bodyPr>
+          <a:lstStyle/>
+          <a:p>
+            <a:pPr algn="l">
+              <a:lnSpc>
+                <a:spcPts val="2783"/>
+              </a:lnSpc>
+              <a:spcBef>
+                <a:spcPts val="0"/>
+              </a:spcBef>
+              <a:spcAft>
+                <a:spcPts val="0"/>
+              </a:spcAft>
+              <a:defRPr sz="2400" b="1" lang="pl-PL">
+                <a:solidFill>
+                  <a:srgbClr val="18232D"/>
+                </a:solidFill>
+                <a:latin typeface="FreeSans"/>
+              </a:defRPr>
+            </a:pPr>
+            <a:r>
+              <a:t>net_margin</a:t>
+            </a:r>
+          </a:p>
+        </p:txBody>
+      </p:sp>
+      <p:sp>
+        <p:nvSpPr>
+          <p:cNvPr id="12" name="TextBox 11"/>
+          <p:cNvSpPr txBox="1"/>
+          <p:nvPr/>
+        </p:nvSpPr>
+        <p:spPr>
+          <a:xfrm>
+            <a:off x="4389120" y="2880360"/>
+            <a:ext cx="9363456" cy="429768"/>
+          </a:xfrm>
+          <a:prstGeom prst="rect">
+            <a:avLst/>
+          </a:prstGeom>
+          <a:noFill/>
+        </p:spPr>
+        <p:txBody>
+          <a:bodyPr wrap="square" lIns="0" rIns="0" tIns="0" bIns="0" anchor="t">
+            <a:noAutofit/>
+          </a:bodyPr>
+          <a:lstStyle/>
+          <a:p>
+            <a:pPr algn="l">
+              <a:lnSpc>
+                <a:spcPts val="2783"/>
+              </a:lnSpc>
+              <a:spcBef>
+                <a:spcPts val="0"/>
+              </a:spcBef>
+              <a:spcAft>
+                <a:spcPts val="0"/>
+              </a:spcAft>
+              <a:defRPr sz="2400" b="0" lang="pl-PL">
+                <a:solidFill>
+                  <a:srgbClr val="18232D"/>
+                </a:solidFill>
+                <a:latin typeface="FreeSans"/>
+              </a:defRPr>
+            </a:pPr>
+            <a:r>
+              <a:t>Zysk netto jednostki dominującej / przychody — marża netto.</a:t>
+            </a:r>
+          </a:p>
+        </p:txBody>
+      </p:sp>
+      <p:sp>
+        <p:nvSpPr>
+          <p:cNvPr id="13" name="Rectangle 12"/>
+          <p:cNvSpPr/>
+          <p:nvPr/>
+        </p:nvSpPr>
+        <p:spPr>
+          <a:xfrm>
+            <a:off x="658368" y="3538727"/>
+            <a:ext cx="13313664" cy="658368"/>
+          </a:xfrm>
+          <a:prstGeom prst="rect">
+            <a:avLst/>
+          </a:prstGeom>
+          <a:solidFill>
+            <a:srgbClr val="F2F5F7"/>
+          </a:solidFill>
+          <a:ln>
+            <a:noFill/>
+          </a:ln>
+        </p:spPr>
+        <p:style>
+          <a:lnRef idx="1">
+            <a:schemeClr val="accent1"/>
+          </a:lnRef>
+          <a:fillRef idx="3">
+            <a:schemeClr val="accent1"/>
+          </a:fillRef>
+          <a:effectRef idx="2">
+            <a:schemeClr val="accent1"/>
+          </a:effectRef>
+          <a:fontRef idx="minor">
+            <a:schemeClr val="lt1"/>
+          </a:fontRef>
+        </p:style>
+        <p:txBody>
+          <a:bodyPr rtlCol="0" anchor="ctr"/>
+          <a:lstStyle/>
+          <a:p>
+            <a:pPr algn="ctr"/>
+          </a:p>
+        </p:txBody>
+      </p:sp>
+      <p:sp>
+        <p:nvSpPr>
+          <p:cNvPr id="14" name="TextBox 13"/>
+          <p:cNvSpPr txBox="1"/>
+          <p:nvPr/>
+        </p:nvSpPr>
+        <p:spPr>
+          <a:xfrm>
+            <a:off x="786384" y="3648456"/>
+            <a:ext cx="3465576" cy="429768"/>
+          </a:xfrm>
+          <a:prstGeom prst="rect">
+            <a:avLst/>
+          </a:prstGeom>
+          <a:noFill/>
+        </p:spPr>
+        <p:txBody>
+          <a:bodyPr wrap="square" lIns="0" rIns="0" tIns="0" bIns="0" anchor="t">
+            <a:noAutofit/>
+          </a:bodyPr>
+          <a:lstStyle/>
+          <a:p>
+            <a:pPr algn="l">
+              <a:lnSpc>
+                <a:spcPts val="2783"/>
+              </a:lnSpc>
+              <a:spcBef>
+                <a:spcPts val="0"/>
+              </a:spcBef>
+              <a:spcAft>
+                <a:spcPts val="0"/>
+              </a:spcAft>
+              <a:defRPr sz="2400" b="1" lang="pl-PL">
+                <a:solidFill>
+                  <a:srgbClr val="18232D"/>
+                </a:solidFill>
+                <a:latin typeface="FreeSans"/>
+              </a:defRPr>
+            </a:pPr>
+            <a:r>
+              <a:t>operating_margin</a:t>
+            </a:r>
+          </a:p>
+        </p:txBody>
+      </p:sp>
+      <p:sp>
+        <p:nvSpPr>
+          <p:cNvPr id="15" name="TextBox 14"/>
+          <p:cNvSpPr txBox="1"/>
+          <p:nvPr/>
+        </p:nvSpPr>
+        <p:spPr>
+          <a:xfrm>
+            <a:off x="4389120" y="3648456"/>
+            <a:ext cx="9363456" cy="429768"/>
+          </a:xfrm>
+          <a:prstGeom prst="rect">
+            <a:avLst/>
+          </a:prstGeom>
+          <a:noFill/>
+        </p:spPr>
+        <p:txBody>
+          <a:bodyPr wrap="square" lIns="0" rIns="0" tIns="0" bIns="0" anchor="t">
+            <a:noAutofit/>
+          </a:bodyPr>
+          <a:lstStyle/>
+          <a:p>
+            <a:pPr algn="l">
+              <a:lnSpc>
+                <a:spcPts val="2783"/>
+              </a:lnSpc>
+              <a:spcBef>
+                <a:spcPts val="0"/>
+              </a:spcBef>
+              <a:spcAft>
+                <a:spcPts val="0"/>
+              </a:spcAft>
+              <a:defRPr sz="2400" b="0" lang="pl-PL">
+                <a:solidFill>
+                  <a:srgbClr val="18232D"/>
+                </a:solidFill>
+                <a:latin typeface="FreeSans"/>
+              </a:defRPr>
+            </a:pPr>
+            <a:r>
+              <a:t>Zysk operacyjny / przychody — marża działalności operacyjnej.</a:t>
+            </a:r>
+          </a:p>
+        </p:txBody>
+      </p:sp>
+      <p:sp>
+        <p:nvSpPr>
+          <p:cNvPr id="16" name="Rectangle 15"/>
+          <p:cNvSpPr/>
+          <p:nvPr/>
+        </p:nvSpPr>
+        <p:spPr>
+          <a:xfrm>
+            <a:off x="658368" y="4306824"/>
+            <a:ext cx="13313664" cy="658368"/>
+          </a:xfrm>
+          <a:prstGeom prst="rect">
+            <a:avLst/>
+          </a:prstGeom>
+          <a:solidFill>
+            <a:srgbClr val="F2F5F7"/>
+          </a:solidFill>
+          <a:ln>
+            <a:noFill/>
+          </a:ln>
+        </p:spPr>
+        <p:style>
+          <a:lnRef idx="1">
+            <a:schemeClr val="accent1"/>
+          </a:lnRef>
+          <a:fillRef idx="3">
+            <a:schemeClr val="accent1"/>
+          </a:fillRef>
+          <a:effectRef idx="2">
+            <a:schemeClr val="accent1"/>
+          </a:effectRef>
+          <a:fontRef idx="minor">
+            <a:schemeClr val="lt1"/>
+          </a:fontRef>
+        </p:style>
+        <p:txBody>
+          <a:bodyPr rtlCol="0" anchor="ctr"/>
+          <a:lstStyle/>
+          <a:p>
+            <a:pPr algn="ctr"/>
+          </a:p>
+        </p:txBody>
+      </p:sp>
+      <p:sp>
+        <p:nvSpPr>
+          <p:cNvPr id="17" name="TextBox 16"/>
+          <p:cNvSpPr txBox="1"/>
+          <p:nvPr/>
+        </p:nvSpPr>
+        <p:spPr>
+          <a:xfrm>
+            <a:off x="786384" y="4416552"/>
+            <a:ext cx="3465576" cy="429768"/>
+          </a:xfrm>
+          <a:prstGeom prst="rect">
+            <a:avLst/>
+          </a:prstGeom>
+          <a:noFill/>
+        </p:spPr>
+        <p:txBody>
+          <a:bodyPr wrap="square" lIns="0" rIns="0" tIns="0" bIns="0" anchor="t">
+            <a:noAutofit/>
+          </a:bodyPr>
+          <a:lstStyle/>
+          <a:p>
+            <a:pPr algn="l">
+              <a:lnSpc>
+                <a:spcPts val="2783"/>
+              </a:lnSpc>
+              <a:spcBef>
+                <a:spcPts val="0"/>
+              </a:spcBef>
+              <a:spcAft>
+                <a:spcPts val="0"/>
+              </a:spcAft>
+              <a:defRPr sz="2400" b="1" lang="pl-PL">
+                <a:solidFill>
+                  <a:srgbClr val="18232D"/>
+                </a:solidFill>
+                <a:latin typeface="FreeSans"/>
+              </a:defRPr>
+            </a:pPr>
+            <a:r>
+              <a:t>equity_ratio</a:t>
+            </a:r>
+          </a:p>
+        </p:txBody>
+      </p:sp>
+      <p:sp>
+        <p:nvSpPr>
+          <p:cNvPr id="18" name="TextBox 17"/>
+          <p:cNvSpPr txBox="1"/>
+          <p:nvPr/>
+        </p:nvSpPr>
+        <p:spPr>
+          <a:xfrm>
+            <a:off x="4389120" y="4416552"/>
+            <a:ext cx="9363456" cy="429768"/>
+          </a:xfrm>
+          <a:prstGeom prst="rect">
+            <a:avLst/>
+          </a:prstGeom>
+          <a:noFill/>
+        </p:spPr>
+        <p:txBody>
+          <a:bodyPr wrap="square" lIns="0" rIns="0" tIns="0" bIns="0" anchor="t">
+            <a:noAutofit/>
+          </a:bodyPr>
+          <a:lstStyle/>
+          <a:p>
+            <a:pPr algn="l">
+              <a:lnSpc>
+                <a:spcPts val="2783"/>
+              </a:lnSpc>
+              <a:spcBef>
+                <a:spcPts val="0"/>
+              </a:spcBef>
+              <a:spcAft>
+                <a:spcPts val="0"/>
+              </a:spcAft>
+              <a:defRPr sz="2400" b="0" lang="pl-PL">
+                <a:solidFill>
+                  <a:srgbClr val="18232D"/>
+                </a:solidFill>
+                <a:latin typeface="FreeSans"/>
+              </a:defRPr>
+            </a:pPr>
+            <a:r>
+              <a:t>Kapitał własny / aktywa — udział kapitału w aktywach.</a:t>
+            </a:r>
+          </a:p>
+        </p:txBody>
+      </p:sp>
+      <p:sp>
+        <p:nvSpPr>
+          <p:cNvPr id="19" name="Rectangle 18"/>
+          <p:cNvSpPr/>
+          <p:nvPr/>
+        </p:nvSpPr>
+        <p:spPr>
+          <a:xfrm>
+            <a:off x="658368" y="5074920"/>
+            <a:ext cx="13313664" cy="658368"/>
+          </a:xfrm>
+          <a:prstGeom prst="rect">
+            <a:avLst/>
+          </a:prstGeom>
+          <a:solidFill>
+            <a:srgbClr val="F2F5F7"/>
+          </a:solidFill>
+          <a:ln>
+            <a:noFill/>
+          </a:ln>
+        </p:spPr>
+        <p:style>
+          <a:lnRef idx="1">
+            <a:schemeClr val="accent1"/>
+          </a:lnRef>
+          <a:fillRef idx="3">
+            <a:schemeClr val="accent1"/>
+          </a:fillRef>
+          <a:effectRef idx="2">
+            <a:schemeClr val="accent1"/>
+          </a:effectRef>
+          <a:fontRef idx="minor">
+            <a:schemeClr val="lt1"/>
+          </a:fontRef>
+        </p:style>
+        <p:txBody>
+          <a:bodyPr rtlCol="0" anchor="ctr"/>
+          <a:lstStyle/>
+          <a:p>
+            <a:pPr algn="ctr"/>
+          </a:p>
+        </p:txBody>
+      </p:sp>
+      <p:sp>
+        <p:nvSpPr>
+          <p:cNvPr id="20" name="TextBox 19"/>
+          <p:cNvSpPr txBox="1"/>
+          <p:nvPr/>
+        </p:nvSpPr>
+        <p:spPr>
+          <a:xfrm>
+            <a:off x="786384" y="5184648"/>
+            <a:ext cx="3465576" cy="429768"/>
+          </a:xfrm>
+          <a:prstGeom prst="rect">
+            <a:avLst/>
+          </a:prstGeom>
+          <a:noFill/>
+        </p:spPr>
+        <p:txBody>
+          <a:bodyPr wrap="square" lIns="0" rIns="0" tIns="0" bIns="0" anchor="t">
+            <a:noAutofit/>
+          </a:bodyPr>
+          <a:lstStyle/>
+          <a:p>
+            <a:pPr algn="l">
+              <a:lnSpc>
+                <a:spcPts val="2783"/>
+              </a:lnSpc>
+              <a:spcBef>
+                <a:spcPts val="0"/>
+              </a:spcBef>
+              <a:spcAft>
+                <a:spcPts val="0"/>
+              </a:spcAft>
+              <a:defRPr sz="2400" b="1" lang="pl-PL">
+                <a:solidFill>
+                  <a:srgbClr val="18232D"/>
+                </a:solidFill>
+                <a:latin typeface="FreeSans"/>
+              </a:defRPr>
+            </a:pPr>
+            <a:r>
+              <a:t>debt_to_equity</a:t>
+            </a:r>
+          </a:p>
+        </p:txBody>
+      </p:sp>
+      <p:sp>
+        <p:nvSpPr>
+          <p:cNvPr id="21" name="TextBox 20"/>
+          <p:cNvSpPr txBox="1"/>
+          <p:nvPr/>
+        </p:nvSpPr>
+        <p:spPr>
+          <a:xfrm>
+            <a:off x="4389120" y="5184648"/>
+            <a:ext cx="9363456" cy="429768"/>
+          </a:xfrm>
+          <a:prstGeom prst="rect">
+            <a:avLst/>
+          </a:prstGeom>
+          <a:noFill/>
+        </p:spPr>
+        <p:txBody>
+          <a:bodyPr wrap="square" lIns="0" rIns="0" tIns="0" bIns="0" anchor="t">
+            <a:noAutofit/>
+          </a:bodyPr>
+          <a:lstStyle/>
+          <a:p>
+            <a:pPr algn="l">
+              <a:lnSpc>
+                <a:spcPts val="2783"/>
+              </a:lnSpc>
+              <a:spcBef>
+                <a:spcPts val="0"/>
+              </a:spcBef>
+              <a:spcAft>
+                <a:spcPts val="0"/>
+              </a:spcAft>
+              <a:defRPr sz="2400" b="0" lang="pl-PL">
+                <a:solidFill>
+                  <a:srgbClr val="18232D"/>
+                </a:solidFill>
+                <a:latin typeface="FreeSans"/>
+              </a:defRPr>
+            </a:pPr>
+            <a:r>
+              <a:t>(Zobow. długoterminowe + krótkoterminowe) / kapitał własny.</a:t>
+            </a:r>
+          </a:p>
+        </p:txBody>
+      </p:sp>
+      <p:sp>
+        <p:nvSpPr>
+          <p:cNvPr id="22" name="Rectangle 21"/>
+          <p:cNvSpPr/>
+          <p:nvPr/>
+        </p:nvSpPr>
+        <p:spPr>
+          <a:xfrm>
+            <a:off x="658368" y="5843016"/>
+            <a:ext cx="13313664" cy="658368"/>
+          </a:xfrm>
+          <a:prstGeom prst="rect">
+            <a:avLst/>
+          </a:prstGeom>
+          <a:solidFill>
+            <a:srgbClr val="F2F5F7"/>
+          </a:solidFill>
+          <a:ln>
+            <a:noFill/>
+          </a:ln>
+        </p:spPr>
+        <p:style>
+          <a:lnRef idx="1">
+            <a:schemeClr val="accent1"/>
+          </a:lnRef>
+          <a:fillRef idx="3">
+            <a:schemeClr val="accent1"/>
+          </a:fillRef>
+          <a:effectRef idx="2">
+            <a:schemeClr val="accent1"/>
+          </a:effectRef>
+          <a:fontRef idx="minor">
+            <a:schemeClr val="lt1"/>
+          </a:fontRef>
+        </p:style>
+        <p:txBody>
+          <a:bodyPr rtlCol="0" anchor="ctr"/>
+          <a:lstStyle/>
+          <a:p>
+            <a:pPr algn="ctr"/>
+          </a:p>
+        </p:txBody>
+      </p:sp>
+      <p:sp>
+        <p:nvSpPr>
+          <p:cNvPr id="23" name="TextBox 22"/>
+          <p:cNvSpPr txBox="1"/>
+          <p:nvPr/>
+        </p:nvSpPr>
+        <p:spPr>
+          <a:xfrm>
+            <a:off x="786384" y="5952744"/>
+            <a:ext cx="3465576" cy="429768"/>
+          </a:xfrm>
+          <a:prstGeom prst="rect">
+            <a:avLst/>
+          </a:prstGeom>
+          <a:noFill/>
+        </p:spPr>
+        <p:txBody>
+          <a:bodyPr wrap="square" lIns="0" rIns="0" tIns="0" bIns="0" anchor="t">
+            <a:noAutofit/>
+          </a:bodyPr>
+          <a:lstStyle/>
+          <a:p>
+            <a:pPr algn="l">
+              <a:lnSpc>
+                <a:spcPts val="2783"/>
+              </a:lnSpc>
+              <a:spcBef>
+                <a:spcPts val="0"/>
+              </a:spcBef>
+              <a:spcAft>
+                <a:spcPts val="0"/>
+              </a:spcAft>
+              <a:defRPr sz="2400" b="1" lang="pl-PL">
+                <a:solidFill>
+                  <a:srgbClr val="18232D"/>
+                </a:solidFill>
+                <a:latin typeface="FreeSans"/>
+              </a:defRPr>
+            </a:pPr>
+            <a:r>
+              <a:t>ocf_to_net_income</a:t>
+            </a:r>
+          </a:p>
+        </p:txBody>
+      </p:sp>
+      <p:sp>
+        <p:nvSpPr>
+          <p:cNvPr id="24" name="TextBox 23"/>
+          <p:cNvSpPr txBox="1"/>
+          <p:nvPr/>
+        </p:nvSpPr>
+        <p:spPr>
+          <a:xfrm>
+            <a:off x="4389120" y="5952744"/>
+            <a:ext cx="9363456" cy="429768"/>
+          </a:xfrm>
+          <a:prstGeom prst="rect">
+            <a:avLst/>
+          </a:prstGeom>
+          <a:noFill/>
+        </p:spPr>
+        <p:txBody>
+          <a:bodyPr wrap="square" lIns="0" rIns="0" tIns="0" bIns="0" anchor="t">
+            <a:noAutofit/>
+          </a:bodyPr>
+          <a:lstStyle/>
+          <a:p>
+            <a:pPr algn="l">
+              <a:lnSpc>
+                <a:spcPts val="2783"/>
+              </a:lnSpc>
+              <a:spcBef>
+                <a:spcPts val="0"/>
+              </a:spcBef>
+              <a:spcAft>
+                <a:spcPts val="0"/>
+              </a:spcAft>
+              <a:defRPr sz="2400" b="0" lang="pl-PL">
+                <a:solidFill>
+                  <a:srgbClr val="18232D"/>
+                </a:solidFill>
+                <a:latin typeface="FreeSans"/>
+              </a:defRPr>
+            </a:pPr>
+            <a:r>
+              <a:t>Przepływy operacyjne / zysk netto — relacja gotówki do wyniku.</a:t>
+            </a:r>
+          </a:p>
+        </p:txBody>
+      </p:sp>
+      <p:sp>
+        <p:nvSpPr>
+          <p:cNvPr id="25" name="TextBox 24"/>
+          <p:cNvSpPr txBox="1"/>
+          <p:nvPr/>
+        </p:nvSpPr>
+        <p:spPr>
+          <a:xfrm>
+            <a:off x="658368" y="6812280"/>
+            <a:ext cx="13313664" cy="832104"/>
+          </a:xfrm>
+          <a:prstGeom prst="rect">
+            <a:avLst/>
+          </a:prstGeom>
+          <a:noFill/>
+        </p:spPr>
+        <p:txBody>
+          <a:bodyPr wrap="square" lIns="0" rIns="0" tIns="0" bIns="0" anchor="t">
+            <a:noAutofit/>
+          </a:bodyPr>
+          <a:lstStyle/>
+          <a:p>
+            <a:pPr algn="l">
+              <a:lnSpc>
+                <a:spcPts val="2783"/>
+              </a:lnSpc>
+              <a:spcBef>
+                <a:spcPts val="0"/>
+              </a:spcBef>
+              <a:spcAft>
+                <a:spcPts val="0"/>
+              </a:spcAft>
+              <a:defRPr sz="2400" b="0" lang="pl-PL">
+                <a:solidFill>
+                  <a:srgbClr val="18232D"/>
+                </a:solidFill>
+                <a:latin typeface="FreeSans"/>
+              </a:defRPr>
+            </a:pPr>
+            <a:r>
+              <a:t>Kwoty × unit_multiplier przed obliczeniami; Decimal, bez annualizacji i zmiany walut.</a:t>
+            </a:r>
+            <a:br/>
+            <a:r>
+              <a:t>Brak składnika lub zerowy mianownik → null. W długu wymagane są oba zobowiązania.</a:t>
+            </a:r>
+          </a:p>
+        </p:txBody>
+      </p:sp>
+    </p:spTree>
+  </p:cSld>
+  <p:clrMapOvr>
+    <a:masterClrMapping/>
+  </p:clrMapOvr>
+</p:sld>
+</file>
+
+<file path=ppt/slides/slide7.xml><?xml version="1.0" encoding="utf-8"?>
+<p:sld xmlns:a="http://schemas.openxmlformats.org/drawingml/2006/main" xmlns:p="http://schemas.openxmlformats.org/presentationml/2006/main" xmlns:r="http://schemas.openxmlformats.org/officeDocument/2006/relationships">
+  <p:cSld>
+    <p:bg>
+      <p:bgPr>
+        <a:solidFill>
+          <a:srgbClr val="FFFFFF"/>
+        </a:solidFill>
+        <a:effectLst/>
+      </p:bgPr>
+    </p:bg>
+    <p:spTree>
+      <p:nvGrpSpPr>
+        <p:cNvPr id="1" name=""/>
+        <p:cNvGrpSpPr/>
+        <p:nvPr/>
+      </p:nvGrpSpPr>
+      <p:grpSpPr/>
+      <p:sp>
+        <p:nvSpPr>
+          <p:cNvPr id="2" name="TextBox 1"/>
+          <p:cNvSpPr txBox="1"/>
+          <p:nvPr/>
+        </p:nvSpPr>
+        <p:spPr>
+          <a:xfrm>
+            <a:off x="658368" y="438912"/>
+            <a:ext cx="13313664" cy="731520"/>
+          </a:xfrm>
+          <a:prstGeom prst="rect">
+            <a:avLst/>
+          </a:prstGeom>
+          <a:noFill/>
+        </p:spPr>
+        <p:txBody>
+          <a:bodyPr wrap="square" lIns="0" rIns="0" tIns="0" bIns="0" anchor="t">
+            <a:noAutofit/>
+          </a:bodyPr>
+          <a:lstStyle/>
+          <a:p>
+            <a:pPr algn="l">
+              <a:lnSpc>
+                <a:spcPts val="4640"/>
+              </a:lnSpc>
+              <a:spcBef>
+                <a:spcPts val="0"/>
+              </a:spcBef>
+              <a:spcAft>
+                <a:spcPts val="0"/>
+              </a:spcAft>
+              <a:defRPr sz="4000" b="1" lang="pl-PL">
+                <a:solidFill>
+                  <a:srgbClr val="243B53"/>
+                </a:solidFill>
+                <a:latin typeface="FreeSans"/>
+              </a:defRPr>
+            </a:pPr>
+            <a:r>
+              <a:t>fundamental-table — wykonanie i brakujące dane</a:t>
+            </a:r>
+          </a:p>
+        </p:txBody>
+      </p:sp>
+      <p:sp>
+        <p:nvSpPr>
+          <p:cNvPr id="3" name="Rectangle 2"/>
+          <p:cNvSpPr/>
+          <p:nvPr/>
+        </p:nvSpPr>
+        <p:spPr>
+          <a:xfrm>
+            <a:off x="658368" y="1280160"/>
+            <a:ext cx="13313664" cy="16459"/>
+          </a:xfrm>
+          <a:prstGeom prst="rect">
+            <a:avLst/>
+          </a:prstGeom>
+          <a:solidFill>
+            <a:srgbClr val="CDD5DC"/>
+          </a:solidFill>
+          <a:ln>
+            <a:noFill/>
+          </a:ln>
+        </p:spPr>
+        <p:style>
+          <a:lnRef idx="1">
+            <a:schemeClr val="accent1"/>
+          </a:lnRef>
+          <a:fillRef idx="3">
+            <a:schemeClr val="accent1"/>
+          </a:fillRef>
+          <a:effectRef idx="2">
+            <a:schemeClr val="accent1"/>
+          </a:effectRef>
+          <a:fontRef idx="minor">
+            <a:schemeClr val="lt1"/>
+          </a:fontRef>
+        </p:style>
+        <p:txBody>
+          <a:bodyPr rtlCol="0" anchor="ctr"/>
+          <a:lstStyle/>
+          <a:p>
+            <a:pPr algn="ctr"/>
+          </a:p>
+        </p:txBody>
+      </p:sp>
+      <p:sp>
+        <p:nvSpPr>
+          <p:cNvPr id="4" name="TextBox 3"/>
+          <p:cNvSpPr txBox="1"/>
+          <p:nvPr/>
+        </p:nvSpPr>
+        <p:spPr>
+          <a:xfrm>
+            <a:off x="658368" y="7900416"/>
+            <a:ext cx="6400800" cy="283464"/>
+          </a:xfrm>
+          <a:prstGeom prst="rect">
+            <a:avLst/>
+          </a:prstGeom>
+          <a:noFill/>
+        </p:spPr>
+        <p:txBody>
+          <a:bodyPr wrap="square" lIns="0" rIns="0" tIns="0" bIns="0" anchor="t">
+            <a:noAutofit/>
+          </a:bodyPr>
+          <a:lstStyle/>
+          <a:p>
+            <a:pPr algn="l">
+              <a:lnSpc>
+                <a:spcPts val="1739"/>
+              </a:lnSpc>
+              <a:spcBef>
+                <a:spcPts val="0"/>
+              </a:spcBef>
+              <a:spcAft>
+                <a:spcPts val="0"/>
+              </a:spcAft>
+              <a:defRPr sz="1500" b="0" lang="pl-PL">
+                <a:solidFill>
+                  <a:srgbClr val="4C5B67"/>
+                </a:solidFill>
+                <a:latin typeface="FreeSans"/>
+              </a:defRPr>
+            </a:pPr>
+            <a:r>
+              <a:t>Marek Karbarz · postęp pracy inżynierskiej</a:t>
+            </a:r>
+          </a:p>
+        </p:txBody>
+      </p:sp>
+      <p:sp>
+        <p:nvSpPr>
+          <p:cNvPr id="5" name="TextBox 4"/>
+          <p:cNvSpPr txBox="1"/>
+          <p:nvPr/>
+        </p:nvSpPr>
+        <p:spPr>
+          <a:xfrm>
+            <a:off x="9418320" y="7900416"/>
+            <a:ext cx="2743200" cy="283464"/>
+          </a:xfrm>
+          <a:prstGeom prst="rect">
+            <a:avLst/>
+          </a:prstGeom>
+          <a:noFill/>
+        </p:spPr>
+        <p:txBody>
+          <a:bodyPr wrap="square" lIns="0" rIns="0" tIns="0" bIns="0" anchor="t">
+            <a:noAutofit/>
+          </a:bodyPr>
+          <a:lstStyle/>
+          <a:p>
+            <a:pPr algn="r">
+              <a:lnSpc>
+                <a:spcPts val="1739"/>
+              </a:lnSpc>
+              <a:spcBef>
+                <a:spcPts val="0"/>
+              </a:spcBef>
+              <a:spcAft>
+                <a:spcPts val="0"/>
+              </a:spcAft>
+              <a:defRPr sz="1500" b="0" lang="pl-PL">
+                <a:solidFill>
+                  <a:srgbClr val="4C5B67"/>
+                </a:solidFill>
+                <a:latin typeface="FreeSans"/>
+              </a:defRPr>
+            </a:pPr>
+            <a:r>
+              <a:t>14.10.2026</a:t>
+            </a:r>
+          </a:p>
+        </p:txBody>
+      </p:sp>
+      <p:sp>
+        <p:nvSpPr>
+          <p:cNvPr id="6" name="TextBox 5"/>
+          <p:cNvSpPr txBox="1"/>
+          <p:nvPr/>
+        </p:nvSpPr>
+        <p:spPr>
+          <a:xfrm>
+            <a:off x="12847320" y="7900416"/>
+            <a:ext cx="1097280" cy="283464"/>
+          </a:xfrm>
+          <a:prstGeom prst="rect">
+            <a:avLst/>
+          </a:prstGeom>
+          <a:noFill/>
+        </p:spPr>
+        <p:txBody>
+          <a:bodyPr wrap="square" lIns="0" rIns="0" tIns="0" bIns="0" anchor="t">
+            <a:noAutofit/>
+          </a:bodyPr>
+          <a:lstStyle/>
+          <a:p>
+            <a:pPr algn="r">
+              <a:lnSpc>
+                <a:spcPts val="1739"/>
+              </a:lnSpc>
+              <a:spcBef>
+                <a:spcPts val="0"/>
+              </a:spcBef>
+              <a:spcAft>
+                <a:spcPts val="0"/>
+              </a:spcAft>
+              <a:defRPr sz="1500" b="0" lang="pl-PL">
+                <a:solidFill>
+                  <a:srgbClr val="4C5B67"/>
+                </a:solidFill>
+                <a:latin typeface="FreeSans"/>
+              </a:defRPr>
+            </a:pPr>
+            <a:r>
+              <a:t>7 / 9</a:t>
+            </a:r>
+          </a:p>
+        </p:txBody>
+      </p:sp>
+      <p:sp>
+        <p:nvSpPr>
+          <p:cNvPr id="7" name="TextBox 6"/>
+          <p:cNvSpPr txBox="1"/>
+          <p:nvPr/>
+        </p:nvSpPr>
+        <p:spPr>
+          <a:xfrm>
+            <a:off x="658368" y="1554480"/>
+            <a:ext cx="13313664" cy="475488"/>
+          </a:xfrm>
+          <a:prstGeom prst="rect">
+            <a:avLst/>
+          </a:prstGeom>
+          <a:noFill/>
+        </p:spPr>
+        <p:txBody>
+          <a:bodyPr wrap="square" lIns="0" rIns="0" tIns="0" bIns="0" anchor="t">
+            <a:noAutofit/>
+          </a:bodyPr>
+          <a:lstStyle/>
+          <a:p>
+            <a:pPr algn="l">
+              <a:lnSpc>
+                <a:spcPts val="2899"/>
+              </a:lnSpc>
+              <a:spcBef>
+                <a:spcPts val="0"/>
+              </a:spcBef>
+              <a:spcAft>
+                <a:spcPts val="0"/>
+              </a:spcAft>
+              <a:defRPr sz="2500" b="0" lang="pl-PL">
+                <a:solidFill>
+                  <a:srgbClr val="18232D"/>
+                </a:solidFill>
+                <a:latin typeface="FreeSans"/>
+              </a:defRPr>
+            </a:pPr>
+            <a:r>
+              <a:t>Wycinek rzeczywistego JSON: okres raportu, waluta, konsolidacja, skala i wskaźniki.</a:t>
+            </a:r>
+          </a:p>
+        </p:txBody>
+      </p:sp>
+      <p:pic>
+        <p:nvPicPr>
+          <p:cNvPr id="8" name="Oryginalny wycinek fundamental-table: zachowane metadane raportu i null dla debt_to_equity" descr="Oryginalny wycinek fundamental-table: zachowane metadane raportu i null dla debt_to_equity"/>
+          <p:cNvPicPr>
+            <a:picLocks noChangeAspect="1"/>
+          </p:cNvPicPr>
+          <p:nvPr/>
+        </p:nvPicPr>
+        <p:blipFill>
+          <a:blip r:embed="rId2"/>
+          <a:srcRect b="75244"/>
+          <a:stretch>
+            <a:fillRect/>
+          </a:stretch>
+        </p:blipFill>
+        <p:spPr>
+          <a:xfrm>
+            <a:off x="658368" y="2194560"/>
+            <a:ext cx="13313664" cy="4469490"/>
+          </a:xfrm>
+          <a:prstGeom prst="rect">
+            <a:avLst/>
+          </a:prstGeom>
+        </p:spPr>
+      </p:pic>
+      <p:sp>
+        <p:nvSpPr>
+          <p:cNvPr id="9" name="TextBox 8"/>
+          <p:cNvSpPr txBox="1"/>
+          <p:nvPr/>
+        </p:nvSpPr>
+        <p:spPr>
+          <a:xfrm>
+            <a:off x="658368" y="6894576"/>
+            <a:ext cx="13313664" cy="804672"/>
+          </a:xfrm>
+          <a:prstGeom prst="rect">
+            <a:avLst/>
+          </a:prstGeom>
+          <a:noFill/>
+        </p:spPr>
+        <p:txBody>
+          <a:bodyPr wrap="square" lIns="0" rIns="0" tIns="0" bIns="0" anchor="t">
+            <a:noAutofit/>
+          </a:bodyPr>
+          <a:lstStyle/>
+          <a:p>
+            <a:pPr algn="l">
+              <a:lnSpc>
+                <a:spcPts val="2783"/>
+              </a:lnSpc>
+              <a:spcBef>
+                <a:spcPts val="0"/>
+              </a:spcBef>
+              <a:spcAft>
+                <a:spcPts val="0"/>
+              </a:spcAft>
+              <a:defRPr sz="2400" b="0" lang="pl-PL">
+                <a:solidFill>
+                  <a:srgbClr val="18232D"/>
+                </a:solidFill>
+                <a:latin typeface="FreeSans"/>
+              </a:defRPr>
+            </a:pPr>
+            <a:r>
+              <a:t>Na tym wycinku debt_to_equity = null; spółka pozostaje w tabeli.</a:t>
+            </a:r>
+            <a:br/>
+            <a:r>
+              <a:t>Jeden najnowszy fetched_at na spółkę; sort A–Z, bez łączenia wartości z różnych raportów.</a:t>
+            </a:r>
+          </a:p>
+        </p:txBody>
+      </p:sp>
+    </p:spTree>
+  </p:cSld>
+  <p:clrMapOvr>
+    <a:masterClrMapping/>
+  </p:clrMapOvr>
+</p:sld>
+</file>
+
+<file path=ppt/slides/slide8.xml><?xml version="1.0" encoding="utf-8"?>
+<p:sld xmlns:a="http://schemas.openxmlformats.org/drawingml/2006/main" xmlns:p="http://schemas.openxmlformats.org/presentationml/2006/main" xmlns:r="http://schemas.openxmlformats.org/officeDocument/2006/relationships">
+  <p:cSld>
+    <p:bg>
+      <p:bgPr>
+        <a:solidFill>
+          <a:srgbClr val="FFFFFF"/>
+        </a:solidFill>
+        <a:effectLst/>
+      </p:bgPr>
+    </p:bg>
+    <p:spTree>
+      <p:nvGrpSpPr>
+        <p:cNvPr id="1" name=""/>
+        <p:cNvGrpSpPr/>
+        <p:nvPr/>
+      </p:nvGrpSpPr>
+      <p:grpSpPr/>
+      <p:sp>
+        <p:nvSpPr>
+          <p:cNvPr id="2" name="TextBox 1"/>
+          <p:cNvSpPr txBox="1"/>
+          <p:nvPr/>
+        </p:nvSpPr>
+        <p:spPr>
+          <a:xfrm>
+            <a:off x="658368" y="438912"/>
+            <a:ext cx="13313664" cy="731520"/>
+          </a:xfrm>
+          <a:prstGeom prst="rect">
+            <a:avLst/>
+          </a:prstGeom>
+          <a:noFill/>
+        </p:spPr>
+        <p:txBody>
+          <a:bodyPr wrap="square" lIns="0" rIns="0" tIns="0" bIns="0" anchor="t">
+            <a:noAutofit/>
+          </a:bodyPr>
+          <a:lstStyle/>
+          <a:p>
+            <a:pPr algn="l">
+              <a:lnSpc>
+                <a:spcPts val="4640"/>
+              </a:lnSpc>
+              <a:spcBef>
+                <a:spcPts val="0"/>
+              </a:spcBef>
+              <a:spcAft>
+                <a:spcPts val="0"/>
+              </a:spcAft>
+              <a:defRPr sz="4000" b="1" lang="pl-PL">
+                <a:solidFill>
+                  <a:srgbClr val="243B53"/>
+                </a:solidFill>
+                <a:latin typeface="FreeSans"/>
+              </a:defRPr>
+            </a:pPr>
+            <a:r>
+              <a:t>Problem przed punktacją fundamentów</a:t>
+            </a:r>
+          </a:p>
+        </p:txBody>
+      </p:sp>
+      <p:sp>
+        <p:nvSpPr>
+          <p:cNvPr id="3" name="Rectangle 2"/>
+          <p:cNvSpPr/>
+          <p:nvPr/>
+        </p:nvSpPr>
+        <p:spPr>
+          <a:xfrm>
+            <a:off x="658368" y="1280160"/>
+            <a:ext cx="13313664" cy="16459"/>
+          </a:xfrm>
+          <a:prstGeom prst="rect">
+            <a:avLst/>
+          </a:prstGeom>
+          <a:solidFill>
+            <a:srgbClr val="CDD5DC"/>
+          </a:solidFill>
+          <a:ln>
+            <a:noFill/>
+          </a:ln>
+        </p:spPr>
+        <p:style>
+          <a:lnRef idx="1">
+            <a:schemeClr val="accent1"/>
+          </a:lnRef>
+          <a:fillRef idx="3">
+            <a:schemeClr val="accent1"/>
+          </a:fillRef>
+          <a:effectRef idx="2">
+            <a:schemeClr val="accent1"/>
+          </a:effectRef>
+          <a:fontRef idx="minor">
+            <a:schemeClr val="lt1"/>
+          </a:fontRef>
+        </p:style>
+        <p:txBody>
+          <a:bodyPr rtlCol="0" anchor="ctr"/>
+          <a:lstStyle/>
+          <a:p>
+            <a:pPr algn="ctr"/>
+          </a:p>
+        </p:txBody>
+      </p:sp>
+      <p:sp>
+        <p:nvSpPr>
+          <p:cNvPr id="4" name="TextBox 3"/>
+          <p:cNvSpPr txBox="1"/>
+          <p:nvPr/>
+        </p:nvSpPr>
+        <p:spPr>
+          <a:xfrm>
+            <a:off x="658368" y="7900416"/>
+            <a:ext cx="6400800" cy="283464"/>
+          </a:xfrm>
+          <a:prstGeom prst="rect">
+            <a:avLst/>
+          </a:prstGeom>
+          <a:noFill/>
+        </p:spPr>
+        <p:txBody>
+          <a:bodyPr wrap="square" lIns="0" rIns="0" tIns="0" bIns="0" anchor="t">
+            <a:noAutofit/>
+          </a:bodyPr>
+          <a:lstStyle/>
+          <a:p>
+            <a:pPr algn="l">
+              <a:lnSpc>
+                <a:spcPts val="1739"/>
+              </a:lnSpc>
+              <a:spcBef>
+                <a:spcPts val="0"/>
+              </a:spcBef>
+              <a:spcAft>
+                <a:spcPts val="0"/>
+              </a:spcAft>
+              <a:defRPr sz="1500" b="0" lang="pl-PL">
+                <a:solidFill>
+                  <a:srgbClr val="4C5B67"/>
+                </a:solidFill>
+                <a:latin typeface="FreeSans"/>
+              </a:defRPr>
+            </a:pPr>
+            <a:r>
+              <a:t>Marek Karbarz · postęp pracy inżynierskiej</a:t>
+            </a:r>
+          </a:p>
+        </p:txBody>
+      </p:sp>
+      <p:sp>
+        <p:nvSpPr>
+          <p:cNvPr id="5" name="TextBox 4"/>
+          <p:cNvSpPr txBox="1"/>
+          <p:nvPr/>
+        </p:nvSpPr>
+        <p:spPr>
+          <a:xfrm>
+            <a:off x="9418320" y="7900416"/>
+            <a:ext cx="2743200" cy="283464"/>
+          </a:xfrm>
+          <a:prstGeom prst="rect">
+            <a:avLst/>
+          </a:prstGeom>
+          <a:noFill/>
+        </p:spPr>
+        <p:txBody>
+          <a:bodyPr wrap="square" lIns="0" rIns="0" tIns="0" bIns="0" anchor="t">
+            <a:noAutofit/>
+          </a:bodyPr>
+          <a:lstStyle/>
+          <a:p>
+            <a:pPr algn="r">
+              <a:lnSpc>
+                <a:spcPts val="1739"/>
+              </a:lnSpc>
+              <a:spcBef>
+                <a:spcPts val="0"/>
+              </a:spcBef>
+              <a:spcAft>
+                <a:spcPts val="0"/>
+              </a:spcAft>
+              <a:defRPr sz="1500" b="0" lang="pl-PL">
+                <a:solidFill>
+                  <a:srgbClr val="4C5B67"/>
+                </a:solidFill>
+                <a:latin typeface="FreeSans"/>
+              </a:defRPr>
+            </a:pPr>
+            <a:r>
+              <a:t>14.10.2026</a:t>
+            </a:r>
+          </a:p>
+        </p:txBody>
+      </p:sp>
+      <p:sp>
+        <p:nvSpPr>
+          <p:cNvPr id="6" name="TextBox 5"/>
+          <p:cNvSpPr txBox="1"/>
+          <p:nvPr/>
+        </p:nvSpPr>
+        <p:spPr>
+          <a:xfrm>
+            <a:off x="12847320" y="7900416"/>
+            <a:ext cx="1097280" cy="283464"/>
+          </a:xfrm>
+          <a:prstGeom prst="rect">
+            <a:avLst/>
+          </a:prstGeom>
+          <a:noFill/>
+        </p:spPr>
+        <p:txBody>
+          <a:bodyPr wrap="square" lIns="0" rIns="0" tIns="0" bIns="0" anchor="t">
+            <a:noAutofit/>
+          </a:bodyPr>
+          <a:lstStyle/>
+          <a:p>
+            <a:pPr algn="r">
+              <a:lnSpc>
+                <a:spcPts val="1739"/>
+              </a:lnSpc>
+              <a:spcBef>
+                <a:spcPts val="0"/>
+              </a:spcBef>
+              <a:spcAft>
+                <a:spcPts val="0"/>
+              </a:spcAft>
+              <a:defRPr sz="1500" b="0" lang="pl-PL">
+                <a:solidFill>
+                  <a:srgbClr val="4C5B67"/>
+                </a:solidFill>
+                <a:latin typeface="FreeSans"/>
+              </a:defRPr>
+            </a:pPr>
+            <a:r>
+              <a:t>8 / 9</a:t>
+            </a:r>
+          </a:p>
+        </p:txBody>
+      </p:sp>
+      <p:sp>
+        <p:nvSpPr>
+          <p:cNvPr id="7" name="TextBox 6"/>
+          <p:cNvSpPr txBox="1"/>
+          <p:nvPr/>
+        </p:nvSpPr>
+        <p:spPr>
+          <a:xfrm>
+            <a:off x="658368" y="1572768"/>
+            <a:ext cx="13313664" cy="530352"/>
+          </a:xfrm>
+          <a:prstGeom prst="rect">
+            <a:avLst/>
+          </a:prstGeom>
+          <a:noFill/>
+        </p:spPr>
+        <p:txBody>
+          <a:bodyPr wrap="square" lIns="0" rIns="0" tIns="0" bIns="0" anchor="t">
+            <a:noAutofit/>
+          </a:bodyPr>
+          <a:lstStyle/>
+          <a:p>
+            <a:pPr algn="l">
+              <a:lnSpc>
+                <a:spcPts val="3015"/>
+              </a:lnSpc>
+              <a:spcBef>
+                <a:spcPts val="0"/>
+              </a:spcBef>
+              <a:spcAft>
+                <a:spcPts val="0"/>
+              </a:spcAft>
+              <a:defRPr sz="2600" b="0" lang="pl-PL">
+                <a:solidFill>
+                  <a:srgbClr val="18232D"/>
+                </a:solidFill>
+                <a:latin typeface="FreeSans"/>
+              </a:defRPr>
+            </a:pPr>
+            <a:r>
+              <a:t>Próg ±2% z sezonowości nie definiuje „dobrego” poziomu wskaźnika finansowego.</a:t>
+            </a:r>
+          </a:p>
+        </p:txBody>
+      </p:sp>
+      <p:sp>
+        <p:nvSpPr>
+          <p:cNvPr id="8" name="TextBox 7"/>
+          <p:cNvSpPr txBox="1"/>
+          <p:nvPr/>
+        </p:nvSpPr>
+        <p:spPr>
+          <a:xfrm>
+            <a:off x="658368" y="2423160"/>
+            <a:ext cx="6446520" cy="530352"/>
+          </a:xfrm>
+          <a:prstGeom prst="rect">
+            <a:avLst/>
+          </a:prstGeom>
+          <a:noFill/>
+        </p:spPr>
+        <p:txBody>
+          <a:bodyPr wrap="square" lIns="0" rIns="0" tIns="0" bIns="0" anchor="t">
+            <a:noAutofit/>
+          </a:bodyPr>
+          <a:lstStyle/>
+          <a:p>
+            <a:pPr algn="l">
+              <a:lnSpc>
+                <a:spcPts val="3131"/>
+              </a:lnSpc>
+              <a:spcBef>
+                <a:spcPts val="0"/>
+              </a:spcBef>
+              <a:spcAft>
+                <a:spcPts val="0"/>
+              </a:spcAft>
+              <a:defRPr sz="2700" b="1" lang="pl-PL">
+                <a:solidFill>
+                  <a:srgbClr val="243B53"/>
+                </a:solidFill>
+                <a:latin typeface="FreeSans"/>
+              </a:defRPr>
+            </a:pPr>
+            <a:r>
+              <a:t>Różne wielkości i kierunki oceny</a:t>
+            </a:r>
+          </a:p>
+        </p:txBody>
+      </p:sp>
+      <p:sp>
+        <p:nvSpPr>
+          <p:cNvPr id="9" name="TextBox 8"/>
+          <p:cNvSpPr txBox="1"/>
+          <p:nvPr/>
+        </p:nvSpPr>
+        <p:spPr>
+          <a:xfrm>
+            <a:off x="658368" y="3154680"/>
+            <a:ext cx="6446520" cy="896112"/>
+          </a:xfrm>
+          <a:prstGeom prst="rect">
+            <a:avLst/>
+          </a:prstGeom>
+          <a:noFill/>
+        </p:spPr>
+        <p:txBody>
+          <a:bodyPr wrap="square" lIns="0" rIns="0" tIns="0" bIns="0" anchor="t">
+            <a:noAutofit/>
+          </a:bodyPr>
+          <a:lstStyle/>
+          <a:p>
+            <a:pPr algn="l">
+              <a:lnSpc>
+                <a:spcPts val="2899"/>
+              </a:lnSpc>
+              <a:spcBef>
+                <a:spcPts val="0"/>
+              </a:spcBef>
+              <a:spcAft>
+                <a:spcPts val="0"/>
+              </a:spcAft>
+              <a:defRPr sz="2500" b="0" lang="pl-PL">
+                <a:solidFill>
+                  <a:srgbClr val="18232D"/>
+                </a:solidFill>
+                <a:latin typeface="FreeSans"/>
+              </a:defRPr>
+            </a:pPr>
+            <a:r>
+              <a:t>Sezonowość: zwrot wokół zera.</a:t>
+            </a:r>
+            <a:br/>
+            <a:r>
+              <a:t>Wskaźniki: marże, finansowanie, przepływy.</a:t>
+            </a:r>
+          </a:p>
+        </p:txBody>
+      </p:sp>
+      <p:sp>
+        <p:nvSpPr>
+          <p:cNvPr id="10" name="TextBox 9"/>
+          <p:cNvSpPr txBox="1"/>
+          <p:nvPr/>
+        </p:nvSpPr>
+        <p:spPr>
+          <a:xfrm>
+            <a:off x="658368" y="4343400"/>
+            <a:ext cx="6446520" cy="1554480"/>
+          </a:xfrm>
+          <a:prstGeom prst="rect">
+            <a:avLst/>
+          </a:prstGeom>
+          <a:noFill/>
+        </p:spPr>
+        <p:txBody>
+          <a:bodyPr wrap="square" lIns="0" rIns="0" tIns="0" bIns="0" anchor="t">
+            <a:noAutofit/>
+          </a:bodyPr>
+          <a:lstStyle/>
+          <a:p>
+            <a:pPr algn="l">
+              <a:lnSpc>
+                <a:spcPts val="2899"/>
+              </a:lnSpc>
+              <a:spcBef>
+                <a:spcPts val="0"/>
+              </a:spcBef>
+              <a:spcAft>
+                <a:spcPts val="0"/>
+              </a:spcAft>
+              <a:defRPr sz="2500" b="0" lang="pl-PL">
+                <a:solidFill>
+                  <a:srgbClr val="18232D"/>
+                </a:solidFill>
+                <a:latin typeface="FreeSans"/>
+              </a:defRPr>
+            </a:pPr>
+            <a:r>
+              <a:t>Przykłady skali: marża 10%, kapitał/aktywa</a:t>
+            </a:r>
+            <a:br/>
+            <a:r>
+              <a:t>0,40.</a:t>
+            </a:r>
+            <a:br/>
+            <a:r>
+              <a:t>Pas ±2% dałby niemal każdej spółce</a:t>
+            </a:r>
+            <a:br/>
+            <a:r>
+              <a:t>niefinansowej +1, bez rozróżnienia.</a:t>
+            </a:r>
+          </a:p>
+        </p:txBody>
+      </p:sp>
+      <p:sp>
+        <p:nvSpPr>
+          <p:cNvPr id="11" name="TextBox 10"/>
+          <p:cNvSpPr txBox="1"/>
+          <p:nvPr/>
+        </p:nvSpPr>
+        <p:spPr>
+          <a:xfrm>
+            <a:off x="658368" y="6016752"/>
+            <a:ext cx="6446520" cy="786384"/>
+          </a:xfrm>
+          <a:prstGeom prst="rect">
+            <a:avLst/>
+          </a:prstGeom>
+          <a:noFill/>
+        </p:spPr>
+        <p:txBody>
+          <a:bodyPr wrap="square" lIns="0" rIns="0" tIns="0" bIns="0" anchor="t">
+            <a:noAutofit/>
+          </a:bodyPr>
+          <a:lstStyle/>
+          <a:p>
+            <a:pPr algn="l">
+              <a:lnSpc>
+                <a:spcPts val="2899"/>
+              </a:lnSpc>
+              <a:spcBef>
+                <a:spcPts val="0"/>
+              </a:spcBef>
+              <a:spcAft>
+                <a:spcPts val="0"/>
+              </a:spcAft>
+              <a:defRPr sz="2500" b="1" lang="pl-PL">
+                <a:solidFill>
+                  <a:srgbClr val="18232D"/>
+                </a:solidFill>
+                <a:latin typeface="FreeSans"/>
+              </a:defRPr>
+            </a:pPr>
+            <a:r>
+              <a:t>Dług: wyższe debt_to_equity oznacza</a:t>
+            </a:r>
+            <a:br/>
+            <a:r>
+              <a:t>przeciwny kierunek punktacji.</a:t>
+            </a:r>
+          </a:p>
+        </p:txBody>
+      </p:sp>
+      <p:sp>
+        <p:nvSpPr>
+          <p:cNvPr id="12" name="TextBox 11"/>
+          <p:cNvSpPr txBox="1"/>
+          <p:nvPr/>
+        </p:nvSpPr>
+        <p:spPr>
+          <a:xfrm>
+            <a:off x="7680960" y="2423160"/>
+            <a:ext cx="6272784" cy="530352"/>
+          </a:xfrm>
+          <a:prstGeom prst="rect">
+            <a:avLst/>
+          </a:prstGeom>
+          <a:noFill/>
+        </p:spPr>
+        <p:txBody>
+          <a:bodyPr wrap="square" lIns="0" rIns="0" tIns="0" bIns="0" anchor="t">
+            <a:noAutofit/>
+          </a:bodyPr>
+          <a:lstStyle/>
+          <a:p>
+            <a:pPr algn="l">
+              <a:lnSpc>
+                <a:spcPts val="3131"/>
+              </a:lnSpc>
+              <a:spcBef>
+                <a:spcPts val="0"/>
+              </a:spcBef>
+              <a:spcAft>
+                <a:spcPts val="0"/>
+              </a:spcAft>
+              <a:defRPr sz="2700" b="1" lang="pl-PL">
+                <a:solidFill>
+                  <a:srgbClr val="243B53"/>
+                </a:solidFill>
+                <a:latin typeface="FreeSans"/>
+              </a:defRPr>
+            </a:pPr>
+            <a:r>
+              <a:t>Ograniczenia obecnych danych</a:t>
+            </a:r>
+          </a:p>
+        </p:txBody>
+      </p:sp>
+      <p:sp>
+        <p:nvSpPr>
+          <p:cNvPr id="13" name="TextBox 12"/>
+          <p:cNvSpPr txBox="1"/>
+          <p:nvPr/>
+        </p:nvSpPr>
+        <p:spPr>
+          <a:xfrm>
+            <a:off x="7680960" y="3154680"/>
+            <a:ext cx="6272784" cy="850392"/>
+          </a:xfrm>
+          <a:prstGeom prst="rect">
+            <a:avLst/>
+          </a:prstGeom>
+          <a:noFill/>
+        </p:spPr>
+        <p:txBody>
+          <a:bodyPr wrap="square" lIns="0" rIns="0" tIns="0" bIns="0" anchor="t">
+            <a:noAutofit/>
+          </a:bodyPr>
+          <a:lstStyle/>
+          <a:p>
+            <a:pPr algn="l">
+              <a:lnSpc>
+                <a:spcPts val="2899"/>
+              </a:lnSpc>
+              <a:spcBef>
+                <a:spcPts val="0"/>
+              </a:spcBef>
+              <a:spcAft>
+                <a:spcPts val="0"/>
+              </a:spcAft>
+              <a:defRPr sz="2500" b="0" lang="pl-PL">
+                <a:solidFill>
+                  <a:srgbClr val="18232D"/>
+                </a:solidFill>
+                <a:latin typeface="FreeSans"/>
+              </a:defRPr>
+            </a:pPr>
+            <a:r>
+              <a:t>• Wycena: brak liczby akcji;</a:t>
+            </a:r>
+            <a:br/>
+            <a:r>
+              <a:t>nie ma P/E ani P/B.</a:t>
+            </a:r>
+          </a:p>
+        </p:txBody>
+      </p:sp>
+      <p:sp>
+        <p:nvSpPr>
+          <p:cNvPr id="14" name="TextBox 13"/>
+          <p:cNvSpPr txBox="1"/>
+          <p:nvPr/>
+        </p:nvSpPr>
+        <p:spPr>
+          <a:xfrm>
+            <a:off x="7680960" y="4343400"/>
+            <a:ext cx="6272784" cy="1216152"/>
+          </a:xfrm>
+          <a:prstGeom prst="rect">
+            <a:avLst/>
+          </a:prstGeom>
+          <a:noFill/>
+        </p:spPr>
+        <p:txBody>
+          <a:bodyPr wrap="square" lIns="0" rIns="0" tIns="0" bIns="0" anchor="t">
+            <a:noAutofit/>
+          </a:bodyPr>
+          <a:lstStyle/>
+          <a:p>
+            <a:pPr algn="l">
+              <a:lnSpc>
+                <a:spcPts val="2899"/>
+              </a:lnSpc>
+              <a:spcBef>
+                <a:spcPts val="0"/>
+              </a:spcBef>
+              <a:spcAft>
+                <a:spcPts val="0"/>
+              </a:spcAft>
+              <a:defRPr sz="2500" b="0" lang="pl-PL">
+                <a:solidFill>
+                  <a:srgbClr val="18232D"/>
+                </a:solidFill>
+                <a:latin typeface="FreeSans"/>
+              </a:defRPr>
+            </a:pPr>
+            <a:r>
+              <a:t>• Dynamika r/r: potrzebny poprzedni</a:t>
+            </a:r>
+            <a:br/>
+            <a:r>
+              <a:t>raport; obecnie wskaźniki powstają z</a:t>
+            </a:r>
+            <a:br/>
+            <a:r>
+              <a:t>jednego snapshotu.</a:t>
+            </a:r>
+          </a:p>
+        </p:txBody>
+      </p:sp>
+      <p:sp>
+        <p:nvSpPr>
+          <p:cNvPr id="15" name="TextBox 14"/>
+          <p:cNvSpPr txBox="1"/>
+          <p:nvPr/>
+        </p:nvSpPr>
+        <p:spPr>
+          <a:xfrm>
+            <a:off x="7680960" y="5824728"/>
+            <a:ext cx="6272784" cy="1033271"/>
+          </a:xfrm>
+          <a:prstGeom prst="rect">
+            <a:avLst/>
+          </a:prstGeom>
+          <a:noFill/>
+        </p:spPr>
+        <p:txBody>
+          <a:bodyPr wrap="square" lIns="0" rIns="0" tIns="0" bIns="0" anchor="t">
+            <a:noAutofit/>
+          </a:bodyPr>
+          <a:lstStyle/>
+          <a:p>
+            <a:pPr algn="l">
+              <a:lnSpc>
+                <a:spcPts val="2783"/>
+              </a:lnSpc>
+              <a:spcBef>
+                <a:spcPts val="0"/>
+              </a:spcBef>
+              <a:spcAft>
+                <a:spcPts val="0"/>
+              </a:spcAft>
+              <a:defRPr sz="2400" b="0" lang="pl-PL">
+                <a:solidFill>
+                  <a:srgbClr val="18232D"/>
+                </a:solidFill>
+                <a:latin typeface="FreeSans"/>
+              </a:defRPr>
+            </a:pPr>
+            <a:r>
+              <a:t>• Bank bez przychodów ma marże null. Na</a:t>
+            </a:r>
+            <a:br/>
+            <a:r>
+              <a:t>poprzednim zrzucie przychód był dostępny.</a:t>
+            </a:r>
+          </a:p>
+        </p:txBody>
+      </p:sp>
+      <p:sp>
+        <p:nvSpPr>
+          <p:cNvPr id="16" name="Rectangle 15"/>
+          <p:cNvSpPr/>
+          <p:nvPr/>
+        </p:nvSpPr>
+        <p:spPr>
+          <a:xfrm>
+            <a:off x="658368" y="7059168"/>
+            <a:ext cx="13313664" cy="813816"/>
+          </a:xfrm>
+          <a:prstGeom prst="rect">
+            <a:avLst/>
+          </a:prstGeom>
+          <a:solidFill>
+            <a:srgbClr val="F2F5F7"/>
+          </a:solidFill>
+          <a:ln>
+            <a:noFill/>
+          </a:ln>
+        </p:spPr>
+        <p:style>
+          <a:lnRef idx="1">
+            <a:schemeClr val="accent1"/>
+          </a:lnRef>
+          <a:fillRef idx="3">
+            <a:schemeClr val="accent1"/>
+          </a:fillRef>
+          <a:effectRef idx="2">
+            <a:schemeClr val="accent1"/>
+          </a:effectRef>
+          <a:fontRef idx="minor">
+            <a:schemeClr val="lt1"/>
+          </a:fontRef>
+        </p:style>
+        <p:txBody>
+          <a:bodyPr rtlCol="0" anchor="ctr"/>
+          <a:lstStyle/>
+          <a:p>
+            <a:pPr algn="ctr"/>
+          </a:p>
+        </p:txBody>
+      </p:sp>
+      <p:sp>
+        <p:nvSpPr>
+          <p:cNvPr id="17" name="TextBox 16"/>
+          <p:cNvSpPr txBox="1"/>
+          <p:nvPr/>
+        </p:nvSpPr>
+        <p:spPr>
+          <a:xfrm>
+            <a:off x="804672" y="7104888"/>
+            <a:ext cx="13021056" cy="731520"/>
+          </a:xfrm>
+          <a:prstGeom prst="rect">
+            <a:avLst/>
+          </a:prstGeom>
+          <a:noFill/>
+        </p:spPr>
+        <p:txBody>
+          <a:bodyPr wrap="square" lIns="0" rIns="0" tIns="0" bIns="0" anchor="t">
+            <a:noAutofit/>
+          </a:bodyPr>
+          <a:lstStyle/>
+          <a:p>
+            <a:pPr algn="l">
+              <a:lnSpc>
+                <a:spcPts val="2668"/>
+              </a:lnSpc>
+              <a:spcBef>
+                <a:spcPts val="0"/>
+              </a:spcBef>
+              <a:spcAft>
+                <a:spcPts val="0"/>
+              </a:spcAft>
+              <a:defRPr sz="2300" b="0" lang="pl-PL">
+                <a:solidFill>
+                  <a:srgbClr val="18232D"/>
+                </a:solidFill>
+                <a:latin typeface="FreeSans"/>
+              </a:defRPr>
+            </a:pPr>
+            <a:r>
+              <a:t>Przykład skali punktów: 5 wskaźników → fundamental −5…+5; technical −2…+2.</a:t>
+            </a:r>
+            <a:br/>
+            <a:r>
+              <a:t>Przy wadze fundamental &gt; technical punkty muszą być porównywalne, aby suma była czytelna.</a:t>
+            </a:r>
+          </a:p>
+        </p:txBody>
+      </p:sp>
+    </p:spTree>
+  </p:cSld>
+  <p:clrMapOvr>
+    <a:masterClrMapping/>
+  </p:clrMapOvr>
+</p:sld>
+</file>
+
+<file path=ppt/slides/slide9.xml><?xml version="1.0" encoding="utf-8"?>
+<p:sld xmlns:a="http://schemas.openxmlformats.org/drawingml/2006/main" xmlns:p="http://schemas.openxmlformats.org/presentationml/2006/main" xmlns:r="http://schemas.openxmlformats.org/officeDocument/2006/relationships">
+  <p:cSld>
+    <p:bg>
+      <p:bgPr>
+        <a:solidFill>
+          <a:srgbClr val="FFFFFF"/>
+        </a:solidFill>
+        <a:effectLst/>
+      </p:bgPr>
+    </p:bg>
+    <p:spTree>
+      <p:nvGrpSpPr>
+        <p:cNvPr id="1" name=""/>
+        <p:cNvGrpSpPr/>
+        <p:nvPr/>
+      </p:nvGrpSpPr>
+      <p:grpSpPr/>
+      <p:sp>
+        <p:nvSpPr>
+          <p:cNvPr id="2" name="TextBox 1"/>
+          <p:cNvSpPr txBox="1"/>
+          <p:nvPr/>
+        </p:nvSpPr>
+        <p:spPr>
+          <a:xfrm>
+            <a:off x="658368" y="438912"/>
+            <a:ext cx="13313664" cy="731520"/>
+          </a:xfrm>
+          <a:prstGeom prst="rect">
+            <a:avLst/>
+          </a:prstGeom>
+          <a:noFill/>
+        </p:spPr>
+        <p:txBody>
+          <a:bodyPr wrap="square" lIns="0" rIns="0" tIns="0" bIns="0" anchor="t">
+            <a:noAutofit/>
+          </a:bodyPr>
+          <a:lstStyle/>
+          <a:p>
+            <a:pPr algn="l">
+              <a:lnSpc>
+                <a:spcPts val="4640"/>
+              </a:lnSpc>
+              <a:spcBef>
+                <a:spcPts val="0"/>
+              </a:spcBef>
+              <a:spcAft>
+                <a:spcPts val="0"/>
+              </a:spcAft>
+              <a:defRPr sz="4000" b="1" lang="pl-PL">
+                <a:solidFill>
+                  <a:srgbClr val="243B53"/>
+                </a:solidFill>
+                <a:latin typeface="FreeSans"/>
+              </a:defRPr>
+            </a:pPr>
+            <a:r>
+              <a:t>Decyzja przed kolejnym kodem</a:t>
+            </a:r>
+          </a:p>
+        </p:txBody>
+      </p:sp>
+      <p:sp>
+        <p:nvSpPr>
+          <p:cNvPr id="3" name="Rectangle 2"/>
+          <p:cNvSpPr/>
+          <p:nvPr/>
+        </p:nvSpPr>
+        <p:spPr>
+          <a:xfrm>
+            <a:off x="658368" y="1280160"/>
+            <a:ext cx="13313664" cy="16459"/>
+          </a:xfrm>
+          <a:prstGeom prst="rect">
+            <a:avLst/>
+          </a:prstGeom>
+          <a:solidFill>
+            <a:srgbClr val="CDD5DC"/>
+          </a:solidFill>
+          <a:ln>
+            <a:noFill/>
+          </a:ln>
+        </p:spPr>
+        <p:style>
+          <a:lnRef idx="1">
+            <a:schemeClr val="accent1"/>
+          </a:lnRef>
+          <a:fillRef idx="3">
+            <a:schemeClr val="accent1"/>
+          </a:fillRef>
+          <a:effectRef idx="2">
+            <a:schemeClr val="accent1"/>
+          </a:effectRef>
+          <a:fontRef idx="minor">
+            <a:schemeClr val="lt1"/>
+          </a:fontRef>
+        </p:style>
+        <p:txBody>
+          <a:bodyPr rtlCol="0" anchor="ctr"/>
+          <a:lstStyle/>
+          <a:p>
+            <a:pPr algn="ctr"/>
+          </a:p>
+        </p:txBody>
+      </p:sp>
+      <p:sp>
+        <p:nvSpPr>
+          <p:cNvPr id="4" name="TextBox 3"/>
+          <p:cNvSpPr txBox="1"/>
+          <p:nvPr/>
+        </p:nvSpPr>
+        <p:spPr>
+          <a:xfrm>
+            <a:off x="658368" y="7900416"/>
+            <a:ext cx="6400800" cy="283464"/>
+          </a:xfrm>
+          <a:prstGeom prst="rect">
+            <a:avLst/>
+          </a:prstGeom>
+          <a:noFill/>
+        </p:spPr>
+        <p:txBody>
+          <a:bodyPr wrap="square" lIns="0" rIns="0" tIns="0" bIns="0" anchor="t">
+            <a:noAutofit/>
+          </a:bodyPr>
+          <a:lstStyle/>
+          <a:p>
+            <a:pPr algn="l">
+              <a:lnSpc>
+                <a:spcPts val="1739"/>
+              </a:lnSpc>
+              <a:spcBef>
+                <a:spcPts val="0"/>
+              </a:spcBef>
+              <a:spcAft>
+                <a:spcPts val="0"/>
+              </a:spcAft>
+              <a:defRPr sz="1500" b="0" lang="pl-PL">
+                <a:solidFill>
+                  <a:srgbClr val="4C5B67"/>
+                </a:solidFill>
+                <a:latin typeface="FreeSans"/>
+              </a:defRPr>
+            </a:pPr>
+            <a:r>
+              <a:t>Marek Karbarz · postęp pracy inżynierskiej</a:t>
+            </a:r>
+          </a:p>
+        </p:txBody>
+      </p:sp>
+      <p:sp>
+        <p:nvSpPr>
+          <p:cNvPr id="5" name="TextBox 4"/>
+          <p:cNvSpPr txBox="1"/>
+          <p:nvPr/>
+        </p:nvSpPr>
+        <p:spPr>
+          <a:xfrm>
+            <a:off x="9418320" y="7900416"/>
+            <a:ext cx="2743200" cy="283464"/>
+          </a:xfrm>
+          <a:prstGeom prst="rect">
+            <a:avLst/>
+          </a:prstGeom>
+          <a:noFill/>
+        </p:spPr>
+        <p:txBody>
+          <a:bodyPr wrap="square" lIns="0" rIns="0" tIns="0" bIns="0" anchor="t">
+            <a:noAutofit/>
+          </a:bodyPr>
+          <a:lstStyle/>
+          <a:p>
+            <a:pPr algn="r">
+              <a:lnSpc>
+                <a:spcPts val="1739"/>
+              </a:lnSpc>
+              <a:spcBef>
+                <a:spcPts val="0"/>
+              </a:spcBef>
+              <a:spcAft>
+                <a:spcPts val="0"/>
+              </a:spcAft>
+              <a:defRPr sz="1500" b="0" lang="pl-PL">
+                <a:solidFill>
+                  <a:srgbClr val="4C5B67"/>
+                </a:solidFill>
+                <a:latin typeface="FreeSans"/>
+              </a:defRPr>
+            </a:pPr>
+            <a:r>
+              <a:t>14.10.2026</a:t>
+            </a:r>
+          </a:p>
+        </p:txBody>
+      </p:sp>
+      <p:sp>
+        <p:nvSpPr>
+          <p:cNvPr id="6" name="TextBox 5"/>
+          <p:cNvSpPr txBox="1"/>
+          <p:nvPr/>
+        </p:nvSpPr>
+        <p:spPr>
+          <a:xfrm>
+            <a:off x="12847320" y="7900416"/>
+            <a:ext cx="1097280" cy="283464"/>
+          </a:xfrm>
+          <a:prstGeom prst="rect">
+            <a:avLst/>
+          </a:prstGeom>
+          <a:noFill/>
+        </p:spPr>
+        <p:txBody>
+          <a:bodyPr wrap="square" lIns="0" rIns="0" tIns="0" bIns="0" anchor="t">
+            <a:noAutofit/>
+          </a:bodyPr>
+          <a:lstStyle/>
+          <a:p>
+            <a:pPr algn="r">
+              <a:lnSpc>
+                <a:spcPts val="1739"/>
+              </a:lnSpc>
+              <a:spcBef>
+                <a:spcPts val="0"/>
+              </a:spcBef>
+              <a:spcAft>
+                <a:spcPts val="0"/>
+              </a:spcAft>
+              <a:defRPr sz="1500" b="0" lang="pl-PL">
+                <a:solidFill>
+                  <a:srgbClr val="4C5B67"/>
+                </a:solidFill>
+                <a:latin typeface="FreeSans"/>
+              </a:defRPr>
+            </a:pPr>
+            <a:r>
+              <a:t>9 / 9</a:t>
             </a:r>
           </a:p>
         </p:txBody>
@@ -7166,7 +9310,7 @@
               </a:defRPr>
             </a:pPr>
             <a:r>
-              <a:t>Najbliższy krok: ustalić punkty fundamentalne.</a:t>
+              <a:t>Najbliższy krok: ustalić punkty fundamentalne i regułę braków danych.</a:t>
             </a:r>
             <a:br/>
             <a:r>
@@ -7183,7 +9327,7 @@
         </p:nvSpPr>
         <p:spPr>
           <a:xfrm>
-            <a:off x="658368" y="2651760"/>
+            <a:off x="658368" y="2660904"/>
             <a:ext cx="6400800" cy="521207"/>
           </a:xfrm>
           <a:prstGeom prst="rect">
@@ -7228,7 +9372,7 @@
         </p:nvSpPr>
         <p:spPr>
           <a:xfrm>
-            <a:off x="7680960" y="2651760"/>
+            <a:off x="7680960" y="2660904"/>
             <a:ext cx="6272784" cy="521207"/>
           </a:xfrm>
           <a:prstGeom prst="rect">
@@ -7498,7 +9642,7 @@
         </p:nvSpPr>
         <p:spPr>
           <a:xfrm>
-            <a:off x="7680960" y="3410712"/>
+            <a:off x="7680960" y="3419856"/>
             <a:ext cx="6272784" cy="859536"/>
           </a:xfrm>
           <a:prstGeom prst="rect">
@@ -7547,7 +9691,7 @@
         </p:nvSpPr>
         <p:spPr>
           <a:xfrm>
-            <a:off x="7680960" y="4581144"/>
+            <a:off x="7680960" y="4572000"/>
             <a:ext cx="6272784" cy="795528"/>
           </a:xfrm>
           <a:prstGeom prst="rect">
